--- a/架構細節.pptx
+++ b/架構細節.pptx
@@ -224,7 +224,7 @@
           <a:p>
             <a:fld id="{5F1842FF-CB32-43DF-B9FE-65EF665875B2}" type="datetimeFigureOut">
               <a:rPr lang="zh-TW" altLang="en-US" smtClean="0"/>
-              <a:t>2026/3/21</a:t>
+              <a:t>2026/4/14</a:t>
             </a:fld>
             <a:endParaRPr lang="zh-TW" altLang="en-US"/>
           </a:p>
@@ -1942,7 +1942,7 @@
           <a:p>
             <a:fld id="{B99F414A-AA3B-479F-9443-E87E6DB2D303}" type="datetime1">
               <a:rPr lang="zh-TW" altLang="en-US" smtClean="0"/>
-              <a:t>2026/3/21</a:t>
+              <a:t>2026/4/14</a:t>
             </a:fld>
             <a:endParaRPr lang="zh-TW" altLang="en-US"/>
           </a:p>
@@ -2318,7 +2318,7 @@
           <a:p>
             <a:fld id="{CC964139-FB37-44CF-9649-84761977F7A6}" type="datetime1">
               <a:rPr lang="zh-TW" altLang="en-US" smtClean="0"/>
-              <a:t>2026/3/21</a:t>
+              <a:t>2026/4/14</a:t>
             </a:fld>
             <a:endParaRPr lang="zh-TW" altLang="en-US"/>
           </a:p>
@@ -2586,7 +2586,7 @@
           <a:p>
             <a:fld id="{54A6B276-F255-4EEC-8D40-1223573FF8B6}" type="datetime1">
               <a:rPr lang="zh-TW" altLang="en-US" smtClean="0"/>
-              <a:t>2026/3/21</a:t>
+              <a:t>2026/4/14</a:t>
             </a:fld>
             <a:endParaRPr lang="zh-TW" altLang="en-US"/>
           </a:p>
@@ -3138,7 +3138,7 @@
           <a:p>
             <a:fld id="{59F5CB97-E547-425F-B1EF-51E6D4EAC77F}" type="datetime1">
               <a:rPr lang="zh-TW" altLang="en-US" smtClean="0"/>
-              <a:t>2026/3/21</a:t>
+              <a:t>2026/4/14</a:t>
             </a:fld>
             <a:endParaRPr lang="zh-TW" altLang="en-US"/>
           </a:p>
@@ -3427,7 +3427,7 @@
           <a:p>
             <a:fld id="{F802BE65-6E56-49AE-80DA-7E1BCEC842BD}" type="datetime1">
               <a:rPr lang="zh-TW" altLang="en-US" smtClean="0"/>
-              <a:t>2026/3/21</a:t>
+              <a:t>2026/4/14</a:t>
             </a:fld>
             <a:endParaRPr lang="zh-TW" altLang="en-US"/>
           </a:p>
@@ -3697,7 +3697,7 @@
             <a:fld id="{459D13DB-F681-4B20-BE28-C9CE0BB35DC9}" type="datetime1">
               <a:rPr lang="zh-TW" altLang="en-US" smtClean="0"/>
               <a:pPr/>
-              <a:t>2026/3/21</a:t>
+              <a:t>2026/4/14</a:t>
             </a:fld>
             <a:endParaRPr lang="zh-TW" altLang="en-US" dirty="0"/>
           </a:p>
@@ -7187,7 +7187,7 @@
                 </a:solidFill>
                 <a:latin typeface="Arial" panose="020B0604020202020204" pitchFamily="34" charset="0"/>
               </a:rPr>
-              <a:t>下限為 目前</a:t>
+              <a:t>下限為 新全局下限 </a:t>
             </a:r>
             <a:r>
               <a:rPr lang="en-US" altLang="zh-TW" sz="2000" dirty="0">
@@ -7196,10 +7196,55 @@
                 </a:solidFill>
                 <a:latin typeface="Arial" panose="020B0604020202020204" pitchFamily="34" charset="0"/>
               </a:rPr>
-              <a:t>MK</a:t>
-            </a:r>
-            <a:r>
-              <a:rPr lang="zh-TW" altLang="en-US" sz="2000" dirty="0">
+              <a:t>= max(</a:t>
+            </a:r>
+            <a:r>
+              <a:rPr lang="zh-TW" altLang="en-US" sz="2000" dirty="0">
+                <a:solidFill>
+                  <a:srgbClr val="222222"/>
+                </a:solidFill>
+                <a:latin typeface="Arial" panose="020B0604020202020204" pitchFamily="34" charset="0"/>
+              </a:rPr>
+              <a:t>其他 </a:t>
+            </a:r>
+            <a:r>
+              <a:rPr lang="en-US" altLang="zh-TW" sz="2000" dirty="0">
+                <a:solidFill>
+                  <a:srgbClr val="222222"/>
+                </a:solidFill>
+                <a:latin typeface="Arial" panose="020B0604020202020204" pitchFamily="34" charset="0"/>
+              </a:rPr>
+              <a:t>job </a:t>
+            </a:r>
+            <a:r>
+              <a:rPr lang="zh-TW" altLang="en-US" sz="2000" dirty="0">
+                <a:solidFill>
+                  <a:srgbClr val="222222"/>
+                </a:solidFill>
+                <a:latin typeface="Arial" panose="020B0604020202020204" pitchFamily="34" charset="0"/>
+              </a:rPr>
+              <a:t>原本的下界限 </a:t>
+            </a:r>
+            <a:r>
+              <a:rPr lang="en-US" altLang="zh-TW" sz="2000" dirty="0">
+                <a:solidFill>
+                  <a:srgbClr val="222222"/>
+                </a:solidFill>
+                <a:latin typeface="Arial" panose="020B0604020202020204" pitchFamily="34" charset="0"/>
+              </a:rPr>
+              <a:t>,</a:t>
+            </a:r>
+            <a:r>
+              <a:rPr lang="en-US" altLang="zh-TW" sz="2000" dirty="0" err="1">
+                <a:solidFill>
+                  <a:srgbClr val="222222"/>
+                </a:solidFill>
+                <a:latin typeface="Arial" panose="020B0604020202020204" pitchFamily="34" charset="0"/>
+              </a:rPr>
+              <a:t>job_j</a:t>
+            </a:r>
+            <a:r>
+              <a:rPr lang="en-US" altLang="zh-TW" sz="2000" dirty="0">
                 <a:solidFill>
                   <a:srgbClr val="222222"/>
                 </a:solidFill>
@@ -7208,22 +7253,85 @@
               <a:t> </a:t>
             </a:r>
             <a:r>
+              <a:rPr lang="zh-TW" altLang="en-US" sz="2000" dirty="0">
+                <a:solidFill>
+                  <a:srgbClr val="222222"/>
+                </a:solidFill>
+                <a:latin typeface="Arial" panose="020B0604020202020204" pitchFamily="34" charset="0"/>
+              </a:rPr>
+              <a:t>更新後的新下限</a:t>
+            </a:r>
+            <a:r>
               <a:rPr lang="en-US" altLang="zh-TW" sz="2000" dirty="0">
                 <a:solidFill>
                   <a:srgbClr val="222222"/>
                 </a:solidFill>
                 <a:latin typeface="Arial" panose="020B0604020202020204" pitchFamily="34" charset="0"/>
               </a:rPr>
-              <a:t>+</a:t>
-            </a:r>
-            <a:r>
-              <a:rPr lang="zh-TW" altLang="en-US" sz="2000" dirty="0">
-                <a:solidFill>
-                  <a:srgbClr val="222222"/>
-                </a:solidFill>
-                <a:latin typeface="Arial" panose="020B0604020202020204" pitchFamily="34" charset="0"/>
-              </a:rPr>
-              <a:t> </a:t>
+              <a:t>)</a:t>
+            </a:r>
+            <a:r>
+              <a:rPr lang="zh-TW" altLang="en-US" sz="2000" dirty="0">
+                <a:solidFill>
+                  <a:srgbClr val="222222"/>
+                </a:solidFill>
+                <a:latin typeface="Arial" panose="020B0604020202020204" pitchFamily="34" charset="0"/>
+              </a:rPr>
+              <a:t>，而在排</a:t>
+            </a:r>
+            <a:r>
+              <a:rPr lang="en-US" altLang="zh-TW" sz="2000" dirty="0" err="1">
+                <a:solidFill>
+                  <a:srgbClr val="222222"/>
+                </a:solidFill>
+                <a:latin typeface="Arial" panose="020B0604020202020204" pitchFamily="34" charset="0"/>
+              </a:rPr>
+              <a:t>job_j</a:t>
+            </a:r>
+            <a:r>
+              <a:rPr lang="zh-TW" altLang="en-US" sz="2000" dirty="0">
+                <a:solidFill>
+                  <a:srgbClr val="222222"/>
+                </a:solidFill>
+                <a:latin typeface="Arial" panose="020B0604020202020204" pitchFamily="34" charset="0"/>
+              </a:rPr>
+              <a:t>時只會更新</a:t>
+            </a:r>
+            <a:r>
+              <a:rPr lang="en-US" altLang="zh-TW" sz="2000" dirty="0" err="1">
+                <a:solidFill>
+                  <a:srgbClr val="222222"/>
+                </a:solidFill>
+                <a:latin typeface="Arial" panose="020B0604020202020204" pitchFamily="34" charset="0"/>
+              </a:rPr>
+              <a:t>job_j</a:t>
+            </a:r>
+            <a:r>
+              <a:rPr lang="zh-TW" altLang="en-US" sz="2000" dirty="0">
+                <a:solidFill>
+                  <a:srgbClr val="222222"/>
+                </a:solidFill>
+                <a:latin typeface="Arial" panose="020B0604020202020204" pitchFamily="34" charset="0"/>
+              </a:rPr>
+              <a:t>下限，所以當</a:t>
+            </a:r>
+            <a:r>
+              <a:rPr lang="en-US" altLang="zh-TW" sz="2000" dirty="0" err="1">
+                <a:solidFill>
+                  <a:srgbClr val="222222"/>
+                </a:solidFill>
+                <a:latin typeface="Arial" panose="020B0604020202020204" pitchFamily="34" charset="0"/>
+              </a:rPr>
+              <a:t>job_j</a:t>
+            </a:r>
+            <a:r>
+              <a:rPr lang="zh-TW" altLang="en-US" sz="2000" dirty="0">
+                <a:solidFill>
+                  <a:srgbClr val="222222"/>
+                </a:solidFill>
+                <a:latin typeface="Arial" panose="020B0604020202020204" pitchFamily="34" charset="0"/>
+              </a:rPr>
+              <a:t>下限更新後沒有比其他 </a:t>
             </a:r>
             <a:r>
               <a:rPr lang="en-US" altLang="zh-TW" sz="2000" dirty="0">
@@ -7232,44 +7340,32 @@
                 </a:solidFill>
                 <a:latin typeface="Arial" panose="020B0604020202020204" pitchFamily="34" charset="0"/>
               </a:rPr>
-              <a:t>max(</a:t>
-            </a:r>
-            <a:r>
-              <a:rPr lang="zh-TW" altLang="en-US" sz="2000" dirty="0">
-                <a:solidFill>
-                  <a:srgbClr val="222222"/>
-                </a:solidFill>
-                <a:latin typeface="Arial" panose="020B0604020202020204" pitchFamily="34" charset="0"/>
-              </a:rPr>
-              <a:t>各</a:t>
-            </a:r>
-            <a:r>
-              <a:rPr lang="en-US" altLang="zh-TW" sz="2000" dirty="0">
-                <a:solidFill>
-                  <a:srgbClr val="222222"/>
-                </a:solidFill>
-                <a:latin typeface="Arial" panose="020B0604020202020204" pitchFamily="34" charset="0"/>
-              </a:rPr>
-              <a:t>job</a:t>
-            </a:r>
-            <a:r>
-              <a:rPr lang="zh-TW" altLang="en-US" sz="2000" dirty="0">
-                <a:solidFill>
-                  <a:srgbClr val="222222"/>
-                </a:solidFill>
-                <a:latin typeface="Arial" panose="020B0604020202020204" pitchFamily="34" charset="0"/>
-              </a:rPr>
-              <a:t>最小完工時間</a:t>
-            </a:r>
-            <a:r>
-              <a:rPr lang="en-US" altLang="zh-TW" sz="2000" dirty="0">
-                <a:solidFill>
-                  <a:srgbClr val="222222"/>
-                </a:solidFill>
-                <a:latin typeface="Arial" panose="020B0604020202020204" pitchFamily="34" charset="0"/>
-              </a:rPr>
-              <a:t>)</a:t>
-            </a:r>
+              <a:t>job </a:t>
+            </a:r>
+            <a:r>
+              <a:rPr lang="zh-TW" altLang="en-US" sz="2000" dirty="0">
+                <a:solidFill>
+                  <a:srgbClr val="222222"/>
+                </a:solidFill>
+                <a:latin typeface="Arial" panose="020B0604020202020204" pitchFamily="34" charset="0"/>
+              </a:rPr>
+              <a:t>原本的下界限</a:t>
+            </a:r>
+            <a:r>
+              <a:rPr lang="zh-TW" altLang="en-US" sz="2000">
+                <a:solidFill>
+                  <a:srgbClr val="222222"/>
+                </a:solidFill>
+                <a:latin typeface="Arial" panose="020B0604020202020204" pitchFamily="34" charset="0"/>
+              </a:rPr>
+              <a:t>大，新全局下限會一樣。</a:t>
+            </a:r>
+            <a:endParaRPr lang="en-US" altLang="zh-TW" sz="2000" dirty="0">
+              <a:solidFill>
+                <a:srgbClr val="222222"/>
+              </a:solidFill>
+              <a:latin typeface="Arial" panose="020B0604020202020204" pitchFamily="34" charset="0"/>
+            </a:endParaRPr>
           </a:p>
           <a:p>
             <a:pPr>

--- a/架構細節.pptx
+++ b/架構細節.pptx
@@ -5,7 +5,7 @@
     <p:sldMasterId id="2147483696" r:id="rId1"/>
   </p:sldMasterIdLst>
   <p:notesMasterIdLst>
-    <p:notesMasterId r:id="rId19"/>
+    <p:notesMasterId r:id="rId20"/>
   </p:notesMasterIdLst>
   <p:sldIdLst>
     <p:sldId id="942" r:id="rId2"/>
@@ -18,13 +18,14 @@
     <p:sldId id="1113" r:id="rId9"/>
     <p:sldId id="1115" r:id="rId10"/>
     <p:sldId id="1117" r:id="rId11"/>
-    <p:sldId id="1116" r:id="rId12"/>
-    <p:sldId id="1118" r:id="rId13"/>
-    <p:sldId id="1119" r:id="rId14"/>
-    <p:sldId id="1120" r:id="rId15"/>
-    <p:sldId id="1121" r:id="rId16"/>
-    <p:sldId id="1122" r:id="rId17"/>
-    <p:sldId id="938" r:id="rId18"/>
+    <p:sldId id="1124" r:id="rId12"/>
+    <p:sldId id="1116" r:id="rId13"/>
+    <p:sldId id="1118" r:id="rId14"/>
+    <p:sldId id="1119" r:id="rId15"/>
+    <p:sldId id="1120" r:id="rId16"/>
+    <p:sldId id="1121" r:id="rId17"/>
+    <p:sldId id="1122" r:id="rId18"/>
+    <p:sldId id="938" r:id="rId19"/>
   </p:sldIdLst>
   <p:sldSz cx="12192000" cy="6858000"/>
   <p:notesSz cx="6858000" cy="9144000"/>
@@ -224,7 +225,7 @@
           <a:p>
             <a:fld id="{5F1842FF-CB32-43DF-B9FE-65EF665875B2}" type="datetimeFigureOut">
               <a:rPr lang="zh-TW" altLang="en-US" smtClean="0"/>
-              <a:t>2026/4/14</a:t>
+              <a:t>2026/4/24</a:t>
             </a:fld>
             <a:endParaRPr lang="zh-TW" altLang="en-US"/>
           </a:p>
@@ -649,7 +650,7 @@
     </p:spTree>
     <p:extLst>
       <p:ext uri="{BB962C8B-B14F-4D97-AF65-F5344CB8AC3E}">
-        <p14:creationId xmlns:p14="http://schemas.microsoft.com/office/powerpoint/2010/main" val="681635575"/>
+        <p14:creationId xmlns:p14="http://schemas.microsoft.com/office/powerpoint/2010/main" val="538229867"/>
       </p:ext>
     </p:extLst>
   </p:cSld>
@@ -733,7 +734,7 @@
     </p:spTree>
     <p:extLst>
       <p:ext uri="{BB962C8B-B14F-4D97-AF65-F5344CB8AC3E}">
-        <p14:creationId xmlns:p14="http://schemas.microsoft.com/office/powerpoint/2010/main" val="3194980993"/>
+        <p14:creationId xmlns:p14="http://schemas.microsoft.com/office/powerpoint/2010/main" val="681635575"/>
       </p:ext>
     </p:extLst>
   </p:cSld>
@@ -817,7 +818,7 @@
     </p:spTree>
     <p:extLst>
       <p:ext uri="{BB962C8B-B14F-4D97-AF65-F5344CB8AC3E}">
-        <p14:creationId xmlns:p14="http://schemas.microsoft.com/office/powerpoint/2010/main" val="389092105"/>
+        <p14:creationId xmlns:p14="http://schemas.microsoft.com/office/powerpoint/2010/main" val="3194980993"/>
       </p:ext>
     </p:extLst>
   </p:cSld>
@@ -901,7 +902,7 @@
     </p:spTree>
     <p:extLst>
       <p:ext uri="{BB962C8B-B14F-4D97-AF65-F5344CB8AC3E}">
-        <p14:creationId xmlns:p14="http://schemas.microsoft.com/office/powerpoint/2010/main" val="3803723329"/>
+        <p14:creationId xmlns:p14="http://schemas.microsoft.com/office/powerpoint/2010/main" val="389092105"/>
       </p:ext>
     </p:extLst>
   </p:cSld>
@@ -985,7 +986,7 @@
     </p:spTree>
     <p:extLst>
       <p:ext uri="{BB962C8B-B14F-4D97-AF65-F5344CB8AC3E}">
-        <p14:creationId xmlns:p14="http://schemas.microsoft.com/office/powerpoint/2010/main" val="1169628965"/>
+        <p14:creationId xmlns:p14="http://schemas.microsoft.com/office/powerpoint/2010/main" val="3803723329"/>
       </p:ext>
     </p:extLst>
   </p:cSld>
@@ -1061,6 +1062,90 @@
             <a:fld id="{F86E097C-2611-49AA-93D4-A0110E9A53C2}" type="slidenum">
               <a:rPr lang="zh-TW" altLang="en-US" smtClean="0"/>
               <a:t>16</a:t>
+            </a:fld>
+            <a:endParaRPr lang="zh-TW" altLang="en-US"/>
+          </a:p>
+        </p:txBody>
+      </p:sp>
+    </p:spTree>
+    <p:extLst>
+      <p:ext uri="{BB962C8B-B14F-4D97-AF65-F5344CB8AC3E}">
+        <p14:creationId xmlns:p14="http://schemas.microsoft.com/office/powerpoint/2010/main" val="1169628965"/>
+      </p:ext>
+    </p:extLst>
+  </p:cSld>
+  <p:clrMapOvr>
+    <a:masterClrMapping/>
+  </p:clrMapOvr>
+</p:notes>
+</file>
+
+<file path=ppt/notesSlides/notesSlide16.xml><?xml version="1.0" encoding="utf-8"?>
+<p:notes xmlns:a="http://schemas.openxmlformats.org/drawingml/2006/main" xmlns:r="http://schemas.openxmlformats.org/officeDocument/2006/relationships" xmlns:p="http://schemas.openxmlformats.org/presentationml/2006/main">
+  <p:cSld>
+    <p:spTree>
+      <p:nvGrpSpPr>
+        <p:cNvPr id="1" name=""/>
+        <p:cNvGrpSpPr/>
+        <p:nvPr/>
+      </p:nvGrpSpPr>
+      <p:grpSpPr>
+        <a:xfrm>
+          <a:off x="0" y="0"/>
+          <a:ext cx="0" cy="0"/>
+          <a:chOff x="0" y="0"/>
+          <a:chExt cx="0" cy="0"/>
+        </a:xfrm>
+      </p:grpSpPr>
+      <p:sp>
+        <p:nvSpPr>
+          <p:cNvPr id="2" name="投影片影像版面配置區 1"/>
+          <p:cNvSpPr>
+            <a:spLocks noGrp="1" noRot="1" noChangeAspect="1"/>
+          </p:cNvSpPr>
+          <p:nvPr>
+            <p:ph type="sldImg"/>
+          </p:nvPr>
+        </p:nvSpPr>
+        <p:spPr/>
+      </p:sp>
+      <p:sp>
+        <p:nvSpPr>
+          <p:cNvPr id="3" name="備忘稿版面配置區 2"/>
+          <p:cNvSpPr>
+            <a:spLocks noGrp="1"/>
+          </p:cNvSpPr>
+          <p:nvPr>
+            <p:ph type="body" idx="1"/>
+          </p:nvPr>
+        </p:nvSpPr>
+        <p:spPr/>
+        <p:txBody>
+          <a:bodyPr/>
+          <a:lstStyle/>
+          <a:p>
+            <a:endParaRPr lang="zh-TW" altLang="en-US" dirty="0"/>
+          </a:p>
+        </p:txBody>
+      </p:sp>
+      <p:sp>
+        <p:nvSpPr>
+          <p:cNvPr id="4" name="投影片編號版面配置區 3"/>
+          <p:cNvSpPr>
+            <a:spLocks noGrp="1"/>
+          </p:cNvSpPr>
+          <p:nvPr>
+            <p:ph type="sldNum" sz="quarter" idx="5"/>
+          </p:nvPr>
+        </p:nvSpPr>
+        <p:spPr/>
+        <p:txBody>
+          <a:bodyPr/>
+          <a:lstStyle/>
+          <a:p>
+            <a:fld id="{F86E097C-2611-49AA-93D4-A0110E9A53C2}" type="slidenum">
+              <a:rPr lang="zh-TW" altLang="en-US" smtClean="0"/>
+              <a:t>17</a:t>
             </a:fld>
             <a:endParaRPr lang="zh-TW" altLang="en-US"/>
           </a:p>
@@ -1942,7 +2027,7 @@
           <a:p>
             <a:fld id="{B99F414A-AA3B-479F-9443-E87E6DB2D303}" type="datetime1">
               <a:rPr lang="zh-TW" altLang="en-US" smtClean="0"/>
-              <a:t>2026/4/14</a:t>
+              <a:t>2026/4/24</a:t>
             </a:fld>
             <a:endParaRPr lang="zh-TW" altLang="en-US"/>
           </a:p>
@@ -2318,7 +2403,7 @@
           <a:p>
             <a:fld id="{CC964139-FB37-44CF-9649-84761977F7A6}" type="datetime1">
               <a:rPr lang="zh-TW" altLang="en-US" smtClean="0"/>
-              <a:t>2026/4/14</a:t>
+              <a:t>2026/4/24</a:t>
             </a:fld>
             <a:endParaRPr lang="zh-TW" altLang="en-US"/>
           </a:p>
@@ -2586,7 +2671,7 @@
           <a:p>
             <a:fld id="{54A6B276-F255-4EEC-8D40-1223573FF8B6}" type="datetime1">
               <a:rPr lang="zh-TW" altLang="en-US" smtClean="0"/>
-              <a:t>2026/4/14</a:t>
+              <a:t>2026/4/24</a:t>
             </a:fld>
             <a:endParaRPr lang="zh-TW" altLang="en-US"/>
           </a:p>
@@ -3138,7 +3223,7 @@
           <a:p>
             <a:fld id="{59F5CB97-E547-425F-B1EF-51E6D4EAC77F}" type="datetime1">
               <a:rPr lang="zh-TW" altLang="en-US" smtClean="0"/>
-              <a:t>2026/4/14</a:t>
+              <a:t>2026/4/24</a:t>
             </a:fld>
             <a:endParaRPr lang="zh-TW" altLang="en-US"/>
           </a:p>
@@ -3427,7 +3512,7 @@
           <a:p>
             <a:fld id="{F802BE65-6E56-49AE-80DA-7E1BCEC842BD}" type="datetime1">
               <a:rPr lang="zh-TW" altLang="en-US" smtClean="0"/>
-              <a:t>2026/4/14</a:t>
+              <a:t>2026/4/24</a:t>
             </a:fld>
             <a:endParaRPr lang="zh-TW" altLang="en-US"/>
           </a:p>
@@ -3697,7 +3782,7 @@
             <a:fld id="{459D13DB-F681-4B20-BE28-C9CE0BB35DC9}" type="datetime1">
               <a:rPr lang="zh-TW" altLang="en-US" smtClean="0"/>
               <a:pPr/>
-              <a:t>2026/4/14</a:t>
+              <a:t>2026/4/24</a:t>
             </a:fld>
             <a:endParaRPr lang="zh-TW" altLang="en-US" dirty="0"/>
           </a:p>
@@ -4976,27 +5061,7 @@
             </a:r>
             <a:r>
               <a:rPr lang="en-US" altLang="zh-TW" dirty="0"/>
-              <a:t>state</a:t>
-            </a:r>
-            <a:r>
-              <a:rPr lang="zh-TW" altLang="en-US" dirty="0"/>
-              <a:t> </a:t>
-            </a:r>
-            <a:r>
-              <a:rPr lang="en-US" altLang="zh-TW" dirty="0"/>
-              <a:t>-</a:t>
-            </a:r>
-            <a:r>
-              <a:rPr lang="en-US" altLang="zh-TW" dirty="0" err="1"/>
-              <a:t>Mch</a:t>
-            </a:r>
-            <a:r>
-              <a:rPr lang="zh-TW" altLang="en-US" dirty="0"/>
-              <a:t> </a:t>
-            </a:r>
-            <a:r>
-              <a:rPr lang="en-US" altLang="zh-TW" dirty="0"/>
-              <a:t>state</a:t>
+              <a:t>state -Op state</a:t>
             </a:r>
             <a:endParaRPr lang="zh-TW" altLang="en-US" dirty="0"/>
           </a:p>
@@ -5102,7 +5167,16 @@
                 </a:solidFill>
                 <a:latin typeface="Arial" panose="020B0604020202020204" pitchFamily="34" charset="0"/>
               </a:rPr>
-              <a:t>Mch_current_available_jc_nums</a:t>
+              <a:t>job_current_tardiness</a:t>
+            </a:r>
+            <a:r>
+              <a:rPr lang="zh-TW" altLang="en-US" sz="2000" dirty="0">
+                <a:solidFill>
+                  <a:srgbClr val="222222"/>
+                </a:solidFill>
+                <a:latin typeface="Arial" panose="020B0604020202020204" pitchFamily="34" charset="0"/>
+              </a:rPr>
+              <a:t>，目前有</a:t>
             </a:r>
             <a:r>
               <a:rPr lang="en-US" altLang="zh-TW" sz="2000" dirty="0">
@@ -5111,16 +5185,16 @@
                 </a:solidFill>
                 <a:latin typeface="Arial" panose="020B0604020202020204" pitchFamily="34" charset="0"/>
               </a:rPr>
-              <a:t> : </a:t>
-            </a:r>
-            <a:r>
-              <a:rPr lang="zh-TW" altLang="en-US" sz="2000" dirty="0">
-                <a:solidFill>
-                  <a:srgbClr val="222222"/>
-                </a:solidFill>
-                <a:latin typeface="Arial" panose="020B0604020202020204" pitchFamily="34" charset="0"/>
-              </a:rPr>
-              <a:t>目前可用的</a:t>
+              <a:t>slack</a:t>
+            </a:r>
+            <a:r>
+              <a:rPr lang="zh-TW" altLang="en-US" sz="2000" dirty="0">
+                <a:solidFill>
+                  <a:srgbClr val="222222"/>
+                </a:solidFill>
+                <a:latin typeface="Arial" panose="020B0604020202020204" pitchFamily="34" charset="0"/>
+              </a:rPr>
+              <a:t>為考慮了後續的</a:t>
             </a:r>
             <a:r>
               <a:rPr lang="en-US" altLang="zh-TW" sz="2000" dirty="0">
@@ -5129,16 +5203,16 @@
                 </a:solidFill>
                 <a:latin typeface="Arial" panose="020B0604020202020204" pitchFamily="34" charset="0"/>
               </a:rPr>
-              <a:t>Job-</a:t>
-            </a:r>
-            <a:r>
-              <a:rPr lang="zh-TW" altLang="en-US" sz="2000" dirty="0">
-                <a:solidFill>
-                  <a:srgbClr val="222222"/>
-                </a:solidFill>
-                <a:latin typeface="Arial" panose="020B0604020202020204" pitchFamily="34" charset="0"/>
-              </a:rPr>
-              <a:t>機台候選配對數</a:t>
+              <a:t>op</a:t>
+            </a:r>
+            <a:r>
+              <a:rPr lang="zh-TW" altLang="en-US" sz="2000" dirty="0">
+                <a:solidFill>
+                  <a:srgbClr val="222222"/>
+                </a:solidFill>
+                <a:latin typeface="Arial" panose="020B0604020202020204" pitchFamily="34" charset="0"/>
+              </a:rPr>
+              <a:t>，使用目前延遲更有急迫性</a:t>
             </a:r>
             <a:endParaRPr lang="en-US" altLang="zh-TW" sz="2000" dirty="0">
               <a:solidFill>
@@ -5160,7 +5234,7 @@
                 </a:solidFill>
                 <a:latin typeface="Arial" panose="020B0604020202020204" pitchFamily="34" charset="0"/>
               </a:rPr>
-              <a:t>Mch_current_available_op_nums</a:t>
+              <a:t>Slack_rank</a:t>
             </a:r>
             <a:r>
               <a:rPr lang="en-US" altLang="zh-TW" sz="2000" dirty="0">
@@ -5169,16 +5243,70 @@
                 </a:solidFill>
                 <a:latin typeface="Arial" panose="020B0604020202020204" pitchFamily="34" charset="0"/>
               </a:rPr>
-              <a:t> :</a:t>
-            </a:r>
-            <a:r>
-              <a:rPr lang="zh-TW" altLang="en-US" sz="2000" dirty="0">
-                <a:solidFill>
-                  <a:srgbClr val="222222"/>
-                </a:solidFill>
-                <a:latin typeface="Arial" panose="020B0604020202020204" pitchFamily="34" charset="0"/>
-              </a:rPr>
-              <a:t>該機台目前可排工序數</a:t>
+              <a:t>:</a:t>
+            </a:r>
+            <a:r>
+              <a:rPr lang="zh-TW" altLang="en-US" sz="2000" dirty="0">
+                <a:solidFill>
+                  <a:srgbClr val="222222"/>
+                </a:solidFill>
+                <a:latin typeface="Arial" panose="020B0604020202020204" pitchFamily="34" charset="0"/>
+              </a:rPr>
+              <a:t> 目前，較相近的為</a:t>
+            </a:r>
+            <a:r>
+              <a:rPr lang="en-US" altLang="zh-TW" sz="2000" dirty="0">
+                <a:solidFill>
+                  <a:srgbClr val="222222"/>
+                </a:solidFill>
+                <a:latin typeface="Arial" panose="020B0604020202020204" pitchFamily="34" charset="0"/>
+              </a:rPr>
+              <a:t>CR</a:t>
+            </a:r>
+            <a:r>
+              <a:rPr lang="zh-TW" altLang="en-US" sz="2000" dirty="0">
+                <a:solidFill>
+                  <a:srgbClr val="222222"/>
+                </a:solidFill>
+                <a:latin typeface="Arial" panose="020B0604020202020204" pitchFamily="34" charset="0"/>
+              </a:rPr>
+              <a:t>值，屬於各</a:t>
+            </a:r>
+            <a:r>
+              <a:rPr lang="en-US" altLang="zh-TW" sz="2000" dirty="0">
+                <a:solidFill>
+                  <a:srgbClr val="222222"/>
+                </a:solidFill>
+                <a:latin typeface="Arial" panose="020B0604020202020204" pitchFamily="34" charset="0"/>
+              </a:rPr>
+              <a:t>job</a:t>
+            </a:r>
+            <a:r>
+              <a:rPr lang="zh-TW" altLang="en-US" sz="2000" dirty="0">
+                <a:solidFill>
+                  <a:srgbClr val="222222"/>
+                </a:solidFill>
+                <a:latin typeface="Arial" panose="020B0604020202020204" pitchFamily="34" charset="0"/>
+              </a:rPr>
+              <a:t>的絕對數值，在不同</a:t>
+            </a:r>
+            <a:r>
+              <a:rPr lang="en-US" altLang="zh-TW" sz="2000" dirty="0">
+                <a:solidFill>
+                  <a:srgbClr val="222222"/>
+                </a:solidFill>
+                <a:latin typeface="Arial" panose="020B0604020202020204" pitchFamily="34" charset="0"/>
+              </a:rPr>
+              <a:t>due date</a:t>
+            </a:r>
+            <a:r>
+              <a:rPr lang="zh-TW" altLang="en-US" sz="2000" dirty="0">
+                <a:solidFill>
+                  <a:srgbClr val="222222"/>
+                </a:solidFill>
+                <a:latin typeface="Arial" panose="020B0604020202020204" pitchFamily="34" charset="0"/>
+              </a:rPr>
+              <a:t>分布的例題排序可能更有意義</a:t>
             </a:r>
             <a:endParaRPr lang="en-US" altLang="zh-TW" sz="2000" dirty="0">
               <a:solidFill>
@@ -5200,16 +5328,7 @@
                 </a:solidFill>
                 <a:latin typeface="Arial" panose="020B0604020202020204" pitchFamily="34" charset="0"/>
               </a:rPr>
-              <a:t>Mch_min_pt</a:t>
-            </a:r>
-            <a:r>
-              <a:rPr lang="zh-TW" altLang="en-US" sz="2000" dirty="0">
-                <a:solidFill>
-                  <a:srgbClr val="222222"/>
-                </a:solidFill>
-                <a:latin typeface="Arial" panose="020B0604020202020204" pitchFamily="34" charset="0"/>
-              </a:rPr>
-              <a:t> </a:t>
+              <a:t>Slack_gap_to_min</a:t>
             </a:r>
             <a:r>
               <a:rPr lang="en-US" altLang="zh-TW" sz="2000" dirty="0">
@@ -5227,7 +5346,7 @@
                 </a:solidFill>
                 <a:latin typeface="Arial" panose="020B0604020202020204" pitchFamily="34" charset="0"/>
               </a:rPr>
-              <a:t> 該機台可選擇</a:t>
+              <a:t> 此</a:t>
             </a:r>
             <a:r>
               <a:rPr lang="en-US" altLang="zh-TW" sz="2000" dirty="0">
@@ -5236,16 +5355,34 @@
                 </a:solidFill>
                 <a:latin typeface="Arial" panose="020B0604020202020204" pitchFamily="34" charset="0"/>
               </a:rPr>
-              <a:t>OP</a:t>
-            </a:r>
-            <a:r>
-              <a:rPr lang="zh-TW" altLang="en-US" sz="2000" dirty="0">
-                <a:solidFill>
-                  <a:srgbClr val="222222"/>
-                </a:solidFill>
-                <a:latin typeface="Arial" panose="020B0604020202020204" pitchFamily="34" charset="0"/>
-              </a:rPr>
-              <a:t>中最小加工時間</a:t>
+              <a:t>job slack</a:t>
+            </a:r>
+            <a:r>
+              <a:rPr lang="zh-TW" altLang="en-US" sz="2000" dirty="0">
+                <a:solidFill>
+                  <a:srgbClr val="222222"/>
+                </a:solidFill>
+                <a:latin typeface="Arial" panose="020B0604020202020204" pitchFamily="34" charset="0"/>
+              </a:rPr>
+              <a:t>與當前最小</a:t>
+            </a:r>
+            <a:r>
+              <a:rPr lang="en-US" altLang="zh-TW" sz="2000" dirty="0">
+                <a:solidFill>
+                  <a:srgbClr val="222222"/>
+                </a:solidFill>
+                <a:latin typeface="Arial" panose="020B0604020202020204" pitchFamily="34" charset="0"/>
+              </a:rPr>
+              <a:t>slack</a:t>
+            </a:r>
+            <a:r>
+              <a:rPr lang="zh-TW" altLang="en-US" sz="2000" dirty="0">
+                <a:solidFill>
+                  <a:srgbClr val="222222"/>
+                </a:solidFill>
+                <a:latin typeface="Arial" panose="020B0604020202020204" pitchFamily="34" charset="0"/>
+              </a:rPr>
+              <a:t>的差值</a:t>
             </a:r>
             <a:endParaRPr lang="en-US" altLang="zh-TW" sz="2000" dirty="0">
               <a:solidFill>
@@ -5267,16 +5404,7 @@
                 </a:solidFill>
                 <a:latin typeface="Arial" panose="020B0604020202020204" pitchFamily="34" charset="0"/>
               </a:rPr>
-              <a:t>mch_mean_pt</a:t>
-            </a:r>
-            <a:r>
-              <a:rPr lang="zh-TW" altLang="en-US" sz="2000" dirty="0">
-                <a:solidFill>
-                  <a:srgbClr val="222222"/>
-                </a:solidFill>
-                <a:latin typeface="Arial" panose="020B0604020202020204" pitchFamily="34" charset="0"/>
-              </a:rPr>
-              <a:t> </a:t>
+              <a:t>Remaining_flex_min</a:t>
             </a:r>
             <a:r>
               <a:rPr lang="en-US" altLang="zh-TW" sz="2000" dirty="0">
@@ -5294,7 +5422,7 @@
                 </a:solidFill>
                 <a:latin typeface="Arial" panose="020B0604020202020204" pitchFamily="34" charset="0"/>
               </a:rPr>
-              <a:t> 該機台可選擇</a:t>
+              <a:t> 從下一道</a:t>
             </a:r>
             <a:r>
               <a:rPr lang="en-US" altLang="zh-TW" sz="2000" dirty="0">
@@ -5303,16 +5431,70 @@
                 </a:solidFill>
                 <a:latin typeface="Arial" panose="020B0604020202020204" pitchFamily="34" charset="0"/>
               </a:rPr>
-              <a:t>OP</a:t>
-            </a:r>
-            <a:r>
-              <a:rPr lang="zh-TW" altLang="en-US" sz="2000" dirty="0">
-                <a:solidFill>
-                  <a:srgbClr val="222222"/>
-                </a:solidFill>
-                <a:latin typeface="Arial" panose="020B0604020202020204" pitchFamily="34" charset="0"/>
-              </a:rPr>
-              <a:t>的平均加工時間</a:t>
+              <a:t>op </a:t>
+            </a:r>
+            <a:r>
+              <a:rPr lang="zh-TW" altLang="en-US" sz="2000" dirty="0">
+                <a:solidFill>
+                  <a:srgbClr val="222222"/>
+                </a:solidFill>
+                <a:latin typeface="Arial" panose="020B0604020202020204" pitchFamily="34" charset="0"/>
+              </a:rPr>
+              <a:t>到 </a:t>
+            </a:r>
+            <a:r>
+              <a:rPr lang="en-US" altLang="zh-TW" sz="2000" dirty="0">
+                <a:solidFill>
+                  <a:srgbClr val="222222"/>
+                </a:solidFill>
+                <a:latin typeface="Arial" panose="020B0604020202020204" pitchFamily="34" charset="0"/>
+              </a:rPr>
+              <a:t>job </a:t>
+            </a:r>
+            <a:r>
+              <a:rPr lang="zh-TW" altLang="en-US" sz="2000" dirty="0">
+                <a:solidFill>
+                  <a:srgbClr val="222222"/>
+                </a:solidFill>
+                <a:latin typeface="Arial" panose="020B0604020202020204" pitchFamily="34" charset="0"/>
+              </a:rPr>
+              <a:t>最後一道 </a:t>
+            </a:r>
+            <a:r>
+              <a:rPr lang="en-US" altLang="zh-TW" sz="2000" dirty="0">
+                <a:solidFill>
+                  <a:srgbClr val="222222"/>
+                </a:solidFill>
+                <a:latin typeface="Arial" panose="020B0604020202020204" pitchFamily="34" charset="0"/>
+              </a:rPr>
+              <a:t>op</a:t>
+            </a:r>
+            <a:r>
+              <a:rPr lang="zh-TW" altLang="en-US" sz="2000" dirty="0">
+                <a:solidFill>
+                  <a:srgbClr val="222222"/>
+                </a:solidFill>
+                <a:latin typeface="Arial" panose="020B0604020202020204" pitchFamily="34" charset="0"/>
+              </a:rPr>
+              <a:t>，最小可行機台比例，目前僅有當前</a:t>
+            </a:r>
+            <a:r>
+              <a:rPr lang="en-US" altLang="zh-TW" sz="2000" dirty="0">
+                <a:solidFill>
+                  <a:srgbClr val="222222"/>
+                </a:solidFill>
+                <a:latin typeface="Arial" panose="020B0604020202020204" pitchFamily="34" charset="0"/>
+              </a:rPr>
+              <a:t>op</a:t>
+            </a:r>
+            <a:r>
+              <a:rPr lang="zh-TW" altLang="en-US" sz="2000" dirty="0">
+                <a:solidFill>
+                  <a:srgbClr val="222222"/>
+                </a:solidFill>
+                <a:latin typeface="Arial" panose="020B0604020202020204" pitchFamily="34" charset="0"/>
+              </a:rPr>
+              <a:t>的可用機台數</a:t>
             </a:r>
             <a:endParaRPr lang="en-US" altLang="zh-TW" sz="2000" dirty="0">
               <a:solidFill>
@@ -5334,113 +5516,25 @@
                 </a:solidFill>
                 <a:latin typeface="Arial" panose="020B0604020202020204" pitchFamily="34" charset="0"/>
               </a:rPr>
-              <a:t>mch_waiting_time</a:t>
-            </a:r>
-            <a:r>
-              <a:rPr lang="en-US" altLang="zh-TW" sz="2000" dirty="0">
-                <a:solidFill>
-                  <a:srgbClr val="222222"/>
-                </a:solidFill>
-                <a:latin typeface="Arial" panose="020B0604020202020204" pitchFamily="34" charset="0"/>
-              </a:rPr>
-              <a:t> :</a:t>
-            </a:r>
-            <a:r>
-              <a:rPr lang="zh-TW" altLang="en-US" sz="2000" dirty="0">
-                <a:solidFill>
-                  <a:srgbClr val="222222"/>
-                </a:solidFill>
-                <a:latin typeface="Arial" panose="020B0604020202020204" pitchFamily="34" charset="0"/>
-              </a:rPr>
-              <a:t> 該機台可選擇</a:t>
-            </a:r>
-            <a:r>
-              <a:rPr lang="en-US" altLang="zh-TW" sz="2000" dirty="0">
-                <a:solidFill>
-                  <a:srgbClr val="222222"/>
-                </a:solidFill>
-                <a:latin typeface="Arial" panose="020B0604020202020204" pitchFamily="34" charset="0"/>
-              </a:rPr>
-              <a:t>OP</a:t>
-            </a:r>
-            <a:r>
-              <a:rPr lang="zh-TW" altLang="en-US" sz="2000" dirty="0">
-                <a:solidFill>
-                  <a:srgbClr val="222222"/>
-                </a:solidFill>
-                <a:latin typeface="Arial" panose="020B0604020202020204" pitchFamily="34" charset="0"/>
-              </a:rPr>
-              <a:t>中排下去造成的最小</a:t>
-            </a:r>
-            <a:r>
-              <a:rPr lang="en-US" altLang="zh-TW" sz="2000" dirty="0">
-                <a:solidFill>
-                  <a:srgbClr val="222222"/>
-                </a:solidFill>
-                <a:latin typeface="Arial" panose="020B0604020202020204" pitchFamily="34" charset="0"/>
-              </a:rPr>
-              <a:t>idle</a:t>
-            </a:r>
-          </a:p>
-          <a:p>
-            <a:pPr>
-              <a:lnSpc>
-                <a:spcPct val="150000"/>
-              </a:lnSpc>
-            </a:pPr>
-            <a:r>
-              <a:rPr lang="en-US" altLang="zh-TW" sz="2000" dirty="0" err="1">
-                <a:solidFill>
-                  <a:srgbClr val="222222"/>
-                </a:solidFill>
-                <a:latin typeface="Arial" panose="020B0604020202020204" pitchFamily="34" charset="0"/>
-              </a:rPr>
-              <a:t>mch_tardiness_pressure</a:t>
-            </a:r>
-            <a:r>
-              <a:rPr lang="zh-TW" altLang="en-US" sz="2000" dirty="0">
-                <a:solidFill>
-                  <a:srgbClr val="222222"/>
-                </a:solidFill>
-                <a:latin typeface="Arial" panose="020B0604020202020204" pitchFamily="34" charset="0"/>
-              </a:rPr>
-              <a:t> </a:t>
-            </a:r>
-            <a:r>
-              <a:rPr lang="en-US" altLang="zh-TW" sz="2000" dirty="0">
-                <a:solidFill>
-                  <a:srgbClr val="222222"/>
-                </a:solidFill>
-                <a:latin typeface="Arial" panose="020B0604020202020204" pitchFamily="34" charset="0"/>
-              </a:rPr>
-              <a:t>:</a:t>
-            </a:r>
-            <a:r>
-              <a:rPr lang="zh-TW" altLang="en-US" sz="2000" dirty="0">
-                <a:solidFill>
-                  <a:srgbClr val="222222"/>
-                </a:solidFill>
-                <a:latin typeface="Arial" panose="020B0604020202020204" pitchFamily="34" charset="0"/>
-              </a:rPr>
-              <a:t> 該機台可選</a:t>
-            </a:r>
-            <a:r>
-              <a:rPr lang="en-US" altLang="zh-TW" sz="2000" dirty="0">
-                <a:solidFill>
-                  <a:srgbClr val="222222"/>
-                </a:solidFill>
-                <a:latin typeface="Arial" panose="020B0604020202020204" pitchFamily="34" charset="0"/>
-              </a:rPr>
-              <a:t>OP</a:t>
-            </a:r>
-            <a:r>
-              <a:rPr lang="zh-TW" altLang="en-US" sz="2000" dirty="0">
-                <a:solidFill>
-                  <a:srgbClr val="222222"/>
-                </a:solidFill>
-                <a:latin typeface="Arial" panose="020B0604020202020204" pitchFamily="34" charset="0"/>
-              </a:rPr>
-              <a:t>中遲交的比率</a:t>
+              <a:t>remaining_flex</a:t>
+            </a:r>
+            <a:r>
+              <a:rPr lang="en-US" altLang="zh-TW" sz="2000" err="1">
+                <a:solidFill>
+                  <a:srgbClr val="222222"/>
+                </a:solidFill>
+                <a:latin typeface="Arial" panose="020B0604020202020204" pitchFamily="34" charset="0"/>
+              </a:rPr>
+              <a:t>_</a:t>
+            </a:r>
+            <a:r>
+              <a:rPr lang="en-US" altLang="zh-TW" sz="2000">
+                <a:solidFill>
+                  <a:srgbClr val="222222"/>
+                </a:solidFill>
+                <a:latin typeface="Arial" panose="020B0604020202020204" pitchFamily="34" charset="0"/>
+              </a:rPr>
+              <a:t>mean</a:t>
             </a:r>
             <a:endParaRPr lang="en-US" altLang="zh-TW" sz="2000" dirty="0">
               <a:solidFill>
@@ -5449,109 +5543,12 @@
               <a:latin typeface="Arial" panose="020B0604020202020204" pitchFamily="34" charset="0"/>
             </a:endParaRPr>
           </a:p>
-          <a:p>
-            <a:pPr>
-              <a:lnSpc>
-                <a:spcPct val="150000"/>
-              </a:lnSpc>
-            </a:pPr>
-            <a:r>
-              <a:rPr lang="zh-TW" altLang="en-US" sz="2000" dirty="0">
-                <a:solidFill>
-                  <a:srgbClr val="222222"/>
-                </a:solidFill>
-                <a:latin typeface="Arial" panose="020B0604020202020204" pitchFamily="34" charset="0"/>
-              </a:rPr>
-              <a:t>未排</a:t>
-            </a:r>
-            <a:r>
-              <a:rPr lang="en-US" altLang="zh-TW" sz="2000" dirty="0">
-                <a:solidFill>
-                  <a:srgbClr val="222222"/>
-                </a:solidFill>
-                <a:latin typeface="Arial" panose="020B0604020202020204" pitchFamily="34" charset="0"/>
-              </a:rPr>
-              <a:t> </a:t>
-            </a:r>
-            <a:r>
-              <a:rPr lang="en-US" altLang="zh-TW" sz="2000" dirty="0" err="1">
-                <a:solidFill>
-                  <a:srgbClr val="222222"/>
-                </a:solidFill>
-                <a:latin typeface="Arial" panose="020B0604020202020204" pitchFamily="34" charset="0"/>
-              </a:rPr>
-              <a:t>mean_slack</a:t>
-            </a:r>
-            <a:r>
-              <a:rPr lang="en-US" altLang="zh-TW" sz="2000" dirty="0">
-                <a:solidFill>
-                  <a:srgbClr val="222222"/>
-                </a:solidFill>
-                <a:latin typeface="Arial" panose="020B0604020202020204" pitchFamily="34" charset="0"/>
-              </a:rPr>
-              <a:t> </a:t>
-            </a:r>
-            <a:r>
-              <a:rPr lang="zh-TW" altLang="en-US" sz="2000" dirty="0">
-                <a:solidFill>
-                  <a:srgbClr val="222222"/>
-                </a:solidFill>
-                <a:latin typeface="Arial" panose="020B0604020202020204" pitchFamily="34" charset="0"/>
-              </a:rPr>
-              <a:t> </a:t>
-            </a:r>
-            <a:r>
-              <a:rPr lang="en-US" altLang="zh-TW" sz="2000" dirty="0">
-                <a:solidFill>
-                  <a:srgbClr val="222222"/>
-                </a:solidFill>
-                <a:latin typeface="Arial" panose="020B0604020202020204" pitchFamily="34" charset="0"/>
-              </a:rPr>
-              <a:t>:</a:t>
-            </a:r>
-            <a:r>
-              <a:rPr lang="zh-TW" altLang="en-US" sz="2000" dirty="0">
-                <a:solidFill>
-                  <a:srgbClr val="222222"/>
-                </a:solidFill>
-                <a:latin typeface="Arial" panose="020B0604020202020204" pitchFamily="34" charset="0"/>
-              </a:rPr>
-              <a:t> 所有未排</a:t>
-            </a:r>
-            <a:r>
-              <a:rPr lang="en-US" altLang="zh-TW" sz="2000" dirty="0">
-                <a:solidFill>
-                  <a:srgbClr val="222222"/>
-                </a:solidFill>
-                <a:latin typeface="Arial" panose="020B0604020202020204" pitchFamily="34" charset="0"/>
-              </a:rPr>
-              <a:t>job</a:t>
-            </a:r>
-            <a:r>
-              <a:rPr lang="zh-TW" altLang="en-US" sz="2000" dirty="0">
-                <a:solidFill>
-                  <a:srgbClr val="222222"/>
-                </a:solidFill>
-                <a:latin typeface="Arial" panose="020B0604020202020204" pitchFamily="34" charset="0"/>
-              </a:rPr>
-              <a:t>的平均</a:t>
-            </a:r>
-            <a:r>
-              <a:rPr lang="en-US" altLang="zh-TW" sz="2000" dirty="0">
-                <a:solidFill>
-                  <a:srgbClr val="222222"/>
-                </a:solidFill>
-                <a:latin typeface="Arial" panose="020B0604020202020204" pitchFamily="34" charset="0"/>
-              </a:rPr>
-              <a:t>slack</a:t>
-            </a:r>
-          </a:p>
         </p:txBody>
       </p:sp>
     </p:spTree>
     <p:extLst>
       <p:ext uri="{BB962C8B-B14F-4D97-AF65-F5344CB8AC3E}">
-        <p14:creationId xmlns:p14="http://schemas.microsoft.com/office/powerpoint/2010/main" val="2819467475"/>
+        <p14:creationId xmlns:p14="http://schemas.microsoft.com/office/powerpoint/2010/main" val="2885529521"/>
       </p:ext>
     </p:extLst>
   </p:cSld>
@@ -5605,7 +5602,15 @@
             </a:r>
             <a:r>
               <a:rPr lang="en-US" altLang="zh-TW" dirty="0"/>
-              <a:t>state -</a:t>
+              <a:t>state</a:t>
+            </a:r>
+            <a:r>
+              <a:rPr lang="zh-TW" altLang="en-US" dirty="0"/>
+              <a:t> </a:t>
+            </a:r>
+            <a:r>
+              <a:rPr lang="en-US" altLang="zh-TW" dirty="0"/>
+              <a:t>-</a:t>
             </a:r>
             <a:r>
               <a:rPr lang="en-US" altLang="zh-TW" dirty="0" err="1"/>
@@ -5717,31 +5722,13 @@
               </a:lnSpc>
             </a:pPr>
             <a:r>
-              <a:rPr lang="zh-TW" altLang="en-US" sz="2000" dirty="0">
-                <a:solidFill>
-                  <a:srgbClr val="222222"/>
-                </a:solidFill>
-                <a:latin typeface="Arial" panose="020B0604020202020204" pitchFamily="34" charset="0"/>
-              </a:rPr>
-              <a:t> 未排 </a:t>
-            </a:r>
-            <a:r>
               <a:rPr lang="en-US" altLang="zh-TW" sz="2000" dirty="0" err="1">
                 <a:solidFill>
                   <a:srgbClr val="222222"/>
                 </a:solidFill>
                 <a:latin typeface="Arial" panose="020B0604020202020204" pitchFamily="34" charset="0"/>
               </a:rPr>
-              <a:t>slack_std</a:t>
-            </a:r>
-            <a:r>
-              <a:rPr lang="zh-TW" altLang="en-US" sz="2000" dirty="0">
-                <a:solidFill>
-                  <a:srgbClr val="222222"/>
-                </a:solidFill>
-                <a:latin typeface="Arial" panose="020B0604020202020204" pitchFamily="34" charset="0"/>
-              </a:rPr>
-              <a:t> </a:t>
+              <a:t>Mch_current_available_jc_nums</a:t>
             </a:r>
             <a:r>
               <a:rPr lang="en-US" altLang="zh-TW" sz="2000" dirty="0">
@@ -5750,16 +5737,16 @@
                 </a:solidFill>
                 <a:latin typeface="Arial" panose="020B0604020202020204" pitchFamily="34" charset="0"/>
               </a:rPr>
-              <a:t>:</a:t>
-            </a:r>
-            <a:r>
-              <a:rPr lang="zh-TW" altLang="en-US" sz="2000" dirty="0">
-                <a:solidFill>
-                  <a:srgbClr val="222222"/>
-                </a:solidFill>
-                <a:latin typeface="Arial" panose="020B0604020202020204" pitchFamily="34" charset="0"/>
-              </a:rPr>
-              <a:t> 所有未排</a:t>
+              <a:t> : </a:t>
+            </a:r>
+            <a:r>
+              <a:rPr lang="zh-TW" altLang="en-US" sz="2000" dirty="0">
+                <a:solidFill>
+                  <a:srgbClr val="222222"/>
+                </a:solidFill>
+                <a:latin typeface="Arial" panose="020B0604020202020204" pitchFamily="34" charset="0"/>
+              </a:rPr>
+              <a:t>目前可用的</a:t>
             </a:r>
             <a:r>
               <a:rPr lang="en-US" altLang="zh-TW" sz="2000" dirty="0">
@@ -5768,34 +5755,16 @@
                 </a:solidFill>
                 <a:latin typeface="Arial" panose="020B0604020202020204" pitchFamily="34" charset="0"/>
               </a:rPr>
-              <a:t>job</a:t>
-            </a:r>
-            <a:r>
-              <a:rPr lang="zh-TW" altLang="en-US" sz="2000" dirty="0">
-                <a:solidFill>
-                  <a:srgbClr val="222222"/>
-                </a:solidFill>
-                <a:latin typeface="Arial" panose="020B0604020202020204" pitchFamily="34" charset="0"/>
-              </a:rPr>
-              <a:t>的</a:t>
-            </a:r>
-            <a:r>
-              <a:rPr lang="en-US" altLang="zh-TW" sz="2000" dirty="0">
-                <a:solidFill>
-                  <a:srgbClr val="222222"/>
-                </a:solidFill>
-                <a:latin typeface="Arial" panose="020B0604020202020204" pitchFamily="34" charset="0"/>
-              </a:rPr>
-              <a:t>slack</a:t>
-            </a:r>
-            <a:r>
-              <a:rPr lang="zh-TW" altLang="en-US" sz="2000" dirty="0">
-                <a:solidFill>
-                  <a:srgbClr val="222222"/>
-                </a:solidFill>
-                <a:latin typeface="Arial" panose="020B0604020202020204" pitchFamily="34" charset="0"/>
-              </a:rPr>
-              <a:t>標準差</a:t>
+              <a:t>Job-</a:t>
+            </a:r>
+            <a:r>
+              <a:rPr lang="zh-TW" altLang="en-US" sz="2000" dirty="0">
+                <a:solidFill>
+                  <a:srgbClr val="222222"/>
+                </a:solidFill>
+                <a:latin typeface="Arial" panose="020B0604020202020204" pitchFamily="34" charset="0"/>
+              </a:rPr>
+              <a:t>機台候選配對數</a:t>
             </a:r>
             <a:endParaRPr lang="en-US" altLang="zh-TW" sz="2000" dirty="0">
               <a:solidFill>
@@ -5811,13 +5780,13 @@
               </a:lnSpc>
             </a:pPr>
             <a:r>
-              <a:rPr lang="zh-TW" altLang="en-US" sz="2000" dirty="0">
-                <a:solidFill>
-                  <a:srgbClr val="222222"/>
-                </a:solidFill>
-                <a:latin typeface="Arial" panose="020B0604020202020204" pitchFamily="34" charset="0"/>
-              </a:rPr>
-              <a:t>壅塞程度</a:t>
+              <a:rPr lang="en-US" altLang="zh-TW" sz="2000" dirty="0" err="1">
+                <a:solidFill>
+                  <a:srgbClr val="222222"/>
+                </a:solidFill>
+                <a:latin typeface="Arial" panose="020B0604020202020204" pitchFamily="34" charset="0"/>
+              </a:rPr>
+              <a:t>Mch_current_available_op_nums</a:t>
             </a:r>
             <a:r>
               <a:rPr lang="en-US" altLang="zh-TW" sz="2000" dirty="0">
@@ -5826,16 +5795,16 @@
                 </a:solidFill>
                 <a:latin typeface="Arial" panose="020B0604020202020204" pitchFamily="34" charset="0"/>
               </a:rPr>
-              <a:t>:</a:t>
-            </a:r>
-            <a:r>
-              <a:rPr lang="zh-TW" altLang="en-US" sz="2000" dirty="0">
-                <a:solidFill>
-                  <a:srgbClr val="222222"/>
-                </a:solidFill>
-                <a:latin typeface="Arial" panose="020B0604020202020204" pitchFamily="34" charset="0"/>
-              </a:rPr>
-              <a:t> 所有未排工單數與機台數的比值</a:t>
+              <a:t> :</a:t>
+            </a:r>
+            <a:r>
+              <a:rPr lang="zh-TW" altLang="en-US" sz="2000" dirty="0">
+                <a:solidFill>
+                  <a:srgbClr val="222222"/>
+                </a:solidFill>
+                <a:latin typeface="Arial" panose="020B0604020202020204" pitchFamily="34" charset="0"/>
+              </a:rPr>
+              <a:t>該機台目前可排工序數</a:t>
             </a:r>
             <a:endParaRPr lang="en-US" altLang="zh-TW" sz="2000" dirty="0">
               <a:solidFill>
@@ -5844,12 +5813,371 @@
               <a:latin typeface="Arial" panose="020B0604020202020204" pitchFamily="34" charset="0"/>
             </a:endParaRPr>
           </a:p>
+          <a:p>
+            <a:pPr>
+              <a:lnSpc>
+                <a:spcPct val="150000"/>
+              </a:lnSpc>
+            </a:pPr>
+            <a:r>
+              <a:rPr lang="en-US" altLang="zh-TW" sz="2000" dirty="0" err="1">
+                <a:solidFill>
+                  <a:srgbClr val="222222"/>
+                </a:solidFill>
+                <a:latin typeface="Arial" panose="020B0604020202020204" pitchFamily="34" charset="0"/>
+              </a:rPr>
+              <a:t>Mch_min_pt</a:t>
+            </a:r>
+            <a:r>
+              <a:rPr lang="zh-TW" altLang="en-US" sz="2000" dirty="0">
+                <a:solidFill>
+                  <a:srgbClr val="222222"/>
+                </a:solidFill>
+                <a:latin typeface="Arial" panose="020B0604020202020204" pitchFamily="34" charset="0"/>
+              </a:rPr>
+              <a:t> </a:t>
+            </a:r>
+            <a:r>
+              <a:rPr lang="en-US" altLang="zh-TW" sz="2000" dirty="0">
+                <a:solidFill>
+                  <a:srgbClr val="222222"/>
+                </a:solidFill>
+                <a:latin typeface="Arial" panose="020B0604020202020204" pitchFamily="34" charset="0"/>
+              </a:rPr>
+              <a:t>:</a:t>
+            </a:r>
+            <a:r>
+              <a:rPr lang="zh-TW" altLang="en-US" sz="2000" dirty="0">
+                <a:solidFill>
+                  <a:srgbClr val="222222"/>
+                </a:solidFill>
+                <a:latin typeface="Arial" panose="020B0604020202020204" pitchFamily="34" charset="0"/>
+              </a:rPr>
+              <a:t> 該機台可選擇</a:t>
+            </a:r>
+            <a:r>
+              <a:rPr lang="en-US" altLang="zh-TW" sz="2000" dirty="0">
+                <a:solidFill>
+                  <a:srgbClr val="222222"/>
+                </a:solidFill>
+                <a:latin typeface="Arial" panose="020B0604020202020204" pitchFamily="34" charset="0"/>
+              </a:rPr>
+              <a:t>OP</a:t>
+            </a:r>
+            <a:r>
+              <a:rPr lang="zh-TW" altLang="en-US" sz="2000" dirty="0">
+                <a:solidFill>
+                  <a:srgbClr val="222222"/>
+                </a:solidFill>
+                <a:latin typeface="Arial" panose="020B0604020202020204" pitchFamily="34" charset="0"/>
+              </a:rPr>
+              <a:t>中最小加工時間</a:t>
+            </a:r>
+            <a:endParaRPr lang="en-US" altLang="zh-TW" sz="2000" dirty="0">
+              <a:solidFill>
+                <a:srgbClr val="222222"/>
+              </a:solidFill>
+              <a:latin typeface="Arial" panose="020B0604020202020204" pitchFamily="34" charset="0"/>
+            </a:endParaRPr>
+          </a:p>
+          <a:p>
+            <a:pPr>
+              <a:lnSpc>
+                <a:spcPct val="150000"/>
+              </a:lnSpc>
+            </a:pPr>
+            <a:r>
+              <a:rPr lang="en-US" altLang="zh-TW" sz="2000" dirty="0" err="1">
+                <a:solidFill>
+                  <a:srgbClr val="222222"/>
+                </a:solidFill>
+                <a:latin typeface="Arial" panose="020B0604020202020204" pitchFamily="34" charset="0"/>
+              </a:rPr>
+              <a:t>mch_mean_pt</a:t>
+            </a:r>
+            <a:r>
+              <a:rPr lang="zh-TW" altLang="en-US" sz="2000" dirty="0">
+                <a:solidFill>
+                  <a:srgbClr val="222222"/>
+                </a:solidFill>
+                <a:latin typeface="Arial" panose="020B0604020202020204" pitchFamily="34" charset="0"/>
+              </a:rPr>
+              <a:t> </a:t>
+            </a:r>
+            <a:r>
+              <a:rPr lang="en-US" altLang="zh-TW" sz="2000" dirty="0">
+                <a:solidFill>
+                  <a:srgbClr val="222222"/>
+                </a:solidFill>
+                <a:latin typeface="Arial" panose="020B0604020202020204" pitchFamily="34" charset="0"/>
+              </a:rPr>
+              <a:t>:</a:t>
+            </a:r>
+            <a:r>
+              <a:rPr lang="zh-TW" altLang="en-US" sz="2000" dirty="0">
+                <a:solidFill>
+                  <a:srgbClr val="222222"/>
+                </a:solidFill>
+                <a:latin typeface="Arial" panose="020B0604020202020204" pitchFamily="34" charset="0"/>
+              </a:rPr>
+              <a:t> 該機台可選擇</a:t>
+            </a:r>
+            <a:r>
+              <a:rPr lang="en-US" altLang="zh-TW" sz="2000" dirty="0">
+                <a:solidFill>
+                  <a:srgbClr val="222222"/>
+                </a:solidFill>
+                <a:latin typeface="Arial" panose="020B0604020202020204" pitchFamily="34" charset="0"/>
+              </a:rPr>
+              <a:t>OP</a:t>
+            </a:r>
+            <a:r>
+              <a:rPr lang="zh-TW" altLang="en-US" sz="2000" dirty="0">
+                <a:solidFill>
+                  <a:srgbClr val="222222"/>
+                </a:solidFill>
+                <a:latin typeface="Arial" panose="020B0604020202020204" pitchFamily="34" charset="0"/>
+              </a:rPr>
+              <a:t>的平均加工時間</a:t>
+            </a:r>
+            <a:endParaRPr lang="en-US" altLang="zh-TW" sz="2000" dirty="0">
+              <a:solidFill>
+                <a:srgbClr val="222222"/>
+              </a:solidFill>
+              <a:latin typeface="Arial" panose="020B0604020202020204" pitchFamily="34" charset="0"/>
+            </a:endParaRPr>
+          </a:p>
+          <a:p>
+            <a:pPr>
+              <a:lnSpc>
+                <a:spcPct val="150000"/>
+              </a:lnSpc>
+            </a:pPr>
+            <a:r>
+              <a:rPr lang="en-US" altLang="zh-TW" sz="2000" dirty="0" err="1">
+                <a:solidFill>
+                  <a:srgbClr val="222222"/>
+                </a:solidFill>
+                <a:latin typeface="Arial" panose="020B0604020202020204" pitchFamily="34" charset="0"/>
+              </a:rPr>
+              <a:t>mch_waiting_time</a:t>
+            </a:r>
+            <a:r>
+              <a:rPr lang="en-US" altLang="zh-TW" sz="2000" dirty="0">
+                <a:solidFill>
+                  <a:srgbClr val="222222"/>
+                </a:solidFill>
+                <a:latin typeface="Arial" panose="020B0604020202020204" pitchFamily="34" charset="0"/>
+              </a:rPr>
+              <a:t> :</a:t>
+            </a:r>
+            <a:r>
+              <a:rPr lang="zh-TW" altLang="en-US" sz="2000" dirty="0">
+                <a:solidFill>
+                  <a:srgbClr val="222222"/>
+                </a:solidFill>
+                <a:latin typeface="Arial" panose="020B0604020202020204" pitchFamily="34" charset="0"/>
+              </a:rPr>
+              <a:t> 該機台可選擇</a:t>
+            </a:r>
+            <a:r>
+              <a:rPr lang="en-US" altLang="zh-TW" sz="2000" dirty="0">
+                <a:solidFill>
+                  <a:srgbClr val="222222"/>
+                </a:solidFill>
+                <a:latin typeface="Arial" panose="020B0604020202020204" pitchFamily="34" charset="0"/>
+              </a:rPr>
+              <a:t>OP</a:t>
+            </a:r>
+            <a:r>
+              <a:rPr lang="zh-TW" altLang="en-US" sz="2000" dirty="0">
+                <a:solidFill>
+                  <a:srgbClr val="222222"/>
+                </a:solidFill>
+                <a:latin typeface="Arial" panose="020B0604020202020204" pitchFamily="34" charset="0"/>
+              </a:rPr>
+              <a:t>中排下去造成的最小</a:t>
+            </a:r>
+            <a:r>
+              <a:rPr lang="en-US" altLang="zh-TW" sz="2000" dirty="0">
+                <a:solidFill>
+                  <a:srgbClr val="222222"/>
+                </a:solidFill>
+                <a:latin typeface="Arial" panose="020B0604020202020204" pitchFamily="34" charset="0"/>
+              </a:rPr>
+              <a:t>idle</a:t>
+            </a:r>
+          </a:p>
+          <a:p>
+            <a:pPr>
+              <a:lnSpc>
+                <a:spcPct val="150000"/>
+              </a:lnSpc>
+            </a:pPr>
+            <a:r>
+              <a:rPr lang="en-US" altLang="zh-TW" sz="2000" dirty="0" err="1">
+                <a:solidFill>
+                  <a:srgbClr val="222222"/>
+                </a:solidFill>
+                <a:latin typeface="Arial" panose="020B0604020202020204" pitchFamily="34" charset="0"/>
+              </a:rPr>
+              <a:t>mch_tardiness_pressure</a:t>
+            </a:r>
+            <a:r>
+              <a:rPr lang="zh-TW" altLang="en-US" sz="2000" dirty="0">
+                <a:solidFill>
+                  <a:srgbClr val="222222"/>
+                </a:solidFill>
+                <a:latin typeface="Arial" panose="020B0604020202020204" pitchFamily="34" charset="0"/>
+              </a:rPr>
+              <a:t> </a:t>
+            </a:r>
+            <a:r>
+              <a:rPr lang="en-US" altLang="zh-TW" sz="2000" dirty="0">
+                <a:solidFill>
+                  <a:srgbClr val="222222"/>
+                </a:solidFill>
+                <a:latin typeface="Arial" panose="020B0604020202020204" pitchFamily="34" charset="0"/>
+              </a:rPr>
+              <a:t>:</a:t>
+            </a:r>
+            <a:r>
+              <a:rPr lang="zh-TW" altLang="en-US" sz="2000" dirty="0">
+                <a:solidFill>
+                  <a:srgbClr val="222222"/>
+                </a:solidFill>
+                <a:latin typeface="Arial" panose="020B0604020202020204" pitchFamily="34" charset="0"/>
+              </a:rPr>
+              <a:t> 該機台可選</a:t>
+            </a:r>
+            <a:r>
+              <a:rPr lang="en-US" altLang="zh-TW" sz="2000" dirty="0">
+                <a:solidFill>
+                  <a:srgbClr val="222222"/>
+                </a:solidFill>
+                <a:latin typeface="Arial" panose="020B0604020202020204" pitchFamily="34" charset="0"/>
+              </a:rPr>
+              <a:t>OP</a:t>
+            </a:r>
+            <a:r>
+              <a:rPr lang="zh-TW" altLang="en-US" sz="2000" dirty="0">
+                <a:solidFill>
+                  <a:srgbClr val="222222"/>
+                </a:solidFill>
+                <a:latin typeface="Arial" panose="020B0604020202020204" pitchFamily="34" charset="0"/>
+              </a:rPr>
+              <a:t>中遲交的比率</a:t>
+            </a:r>
+            <a:endParaRPr lang="en-US" altLang="zh-TW" sz="2000" dirty="0">
+              <a:solidFill>
+                <a:srgbClr val="222222"/>
+              </a:solidFill>
+              <a:latin typeface="Arial" panose="020B0604020202020204" pitchFamily="34" charset="0"/>
+            </a:endParaRPr>
+          </a:p>
+          <a:p>
+            <a:pPr>
+              <a:lnSpc>
+                <a:spcPct val="150000"/>
+              </a:lnSpc>
+            </a:pPr>
+            <a:r>
+              <a:rPr lang="zh-TW" altLang="en-US" sz="2000" dirty="0">
+                <a:solidFill>
+                  <a:srgbClr val="222222"/>
+                </a:solidFill>
+                <a:latin typeface="Arial" panose="020B0604020202020204" pitchFamily="34" charset="0"/>
+              </a:rPr>
+              <a:t>未排</a:t>
+            </a:r>
+            <a:r>
+              <a:rPr lang="en-US" altLang="zh-TW" sz="2000" dirty="0">
+                <a:solidFill>
+                  <a:srgbClr val="222222"/>
+                </a:solidFill>
+                <a:latin typeface="Arial" panose="020B0604020202020204" pitchFamily="34" charset="0"/>
+              </a:rPr>
+              <a:t> </a:t>
+            </a:r>
+            <a:r>
+              <a:rPr lang="en-US" altLang="zh-TW" sz="2000" dirty="0" err="1">
+                <a:solidFill>
+                  <a:srgbClr val="222222"/>
+                </a:solidFill>
+                <a:latin typeface="Arial" panose="020B0604020202020204" pitchFamily="34" charset="0"/>
+              </a:rPr>
+              <a:t>mean_slack</a:t>
+            </a:r>
+            <a:r>
+              <a:rPr lang="en-US" altLang="zh-TW" sz="2000" dirty="0">
+                <a:solidFill>
+                  <a:srgbClr val="222222"/>
+                </a:solidFill>
+                <a:latin typeface="Arial" panose="020B0604020202020204" pitchFamily="34" charset="0"/>
+              </a:rPr>
+              <a:t> </a:t>
+            </a:r>
+            <a:r>
+              <a:rPr lang="zh-TW" altLang="en-US" sz="2000" dirty="0">
+                <a:solidFill>
+                  <a:srgbClr val="222222"/>
+                </a:solidFill>
+                <a:latin typeface="Arial" panose="020B0604020202020204" pitchFamily="34" charset="0"/>
+              </a:rPr>
+              <a:t> </a:t>
+            </a:r>
+            <a:r>
+              <a:rPr lang="en-US" altLang="zh-TW" sz="2000" dirty="0">
+                <a:solidFill>
+                  <a:srgbClr val="222222"/>
+                </a:solidFill>
+                <a:latin typeface="Arial" panose="020B0604020202020204" pitchFamily="34" charset="0"/>
+              </a:rPr>
+              <a:t>:</a:t>
+            </a:r>
+            <a:r>
+              <a:rPr lang="zh-TW" altLang="en-US" sz="2000" dirty="0">
+                <a:solidFill>
+                  <a:srgbClr val="222222"/>
+                </a:solidFill>
+                <a:latin typeface="Arial" panose="020B0604020202020204" pitchFamily="34" charset="0"/>
+              </a:rPr>
+              <a:t> 所有未排</a:t>
+            </a:r>
+            <a:r>
+              <a:rPr lang="en-US" altLang="zh-TW" sz="2000" dirty="0">
+                <a:solidFill>
+                  <a:srgbClr val="222222"/>
+                </a:solidFill>
+                <a:latin typeface="Arial" panose="020B0604020202020204" pitchFamily="34" charset="0"/>
+              </a:rPr>
+              <a:t>job</a:t>
+            </a:r>
+            <a:r>
+              <a:rPr lang="zh-TW" altLang="en-US" sz="2000" dirty="0">
+                <a:solidFill>
+                  <a:srgbClr val="222222"/>
+                </a:solidFill>
+                <a:latin typeface="Arial" panose="020B0604020202020204" pitchFamily="34" charset="0"/>
+              </a:rPr>
+              <a:t>的平均</a:t>
+            </a:r>
+            <a:r>
+              <a:rPr lang="en-US" altLang="zh-TW" sz="2000" dirty="0">
+                <a:solidFill>
+                  <a:srgbClr val="222222"/>
+                </a:solidFill>
+                <a:latin typeface="Arial" panose="020B0604020202020204" pitchFamily="34" charset="0"/>
+              </a:rPr>
+              <a:t>slack</a:t>
+            </a:r>
+          </a:p>
         </p:txBody>
       </p:sp>
     </p:spTree>
     <p:extLst>
       <p:ext uri="{BB962C8B-B14F-4D97-AF65-F5344CB8AC3E}">
-        <p14:creationId xmlns:p14="http://schemas.microsoft.com/office/powerpoint/2010/main" val="2097886425"/>
+        <p14:creationId xmlns:p14="http://schemas.microsoft.com/office/powerpoint/2010/main" val="2819467475"/>
       </p:ext>
     </p:extLst>
   </p:cSld>
@@ -5903,7 +6231,11 @@
             </a:r>
             <a:r>
               <a:rPr lang="en-US" altLang="zh-TW" dirty="0"/>
-              <a:t>state -Pair</a:t>
+              <a:t>state -</a:t>
+            </a:r>
+            <a:r>
+              <a:rPr lang="en-US" altLang="zh-TW" dirty="0" err="1"/>
+              <a:t>Mch</a:t>
             </a:r>
             <a:r>
               <a:rPr lang="zh-TW" altLang="en-US" dirty="0"/>
@@ -5995,8 +6327,8 @@
         </p:nvSpPr>
         <p:spPr>
           <a:xfrm>
-            <a:off x="435428" y="1844039"/>
-            <a:ext cx="11756571" cy="4615745"/>
+            <a:off x="435429" y="1844039"/>
+            <a:ext cx="11288142" cy="4615745"/>
           </a:xfrm>
         </p:spPr>
         <p:txBody>
@@ -6017,7 +6349,25 @@
                 </a:solidFill>
                 <a:latin typeface="Arial" panose="020B0604020202020204" pitchFamily="34" charset="0"/>
               </a:rPr>
-              <a:t> 以</a:t>
+              <a:t> 未排 </a:t>
+            </a:r>
+            <a:r>
+              <a:rPr lang="en-US" altLang="zh-TW" sz="2000" dirty="0" err="1">
+                <a:solidFill>
+                  <a:srgbClr val="222222"/>
+                </a:solidFill>
+                <a:latin typeface="Arial" panose="020B0604020202020204" pitchFamily="34" charset="0"/>
+              </a:rPr>
+              <a:t>slack_std</a:t>
+            </a:r>
+            <a:r>
+              <a:rPr lang="zh-TW" altLang="en-US" sz="2000" dirty="0">
+                <a:solidFill>
+                  <a:srgbClr val="222222"/>
+                </a:solidFill>
+                <a:latin typeface="Arial" panose="020B0604020202020204" pitchFamily="34" charset="0"/>
+              </a:rPr>
+              <a:t> </a:t>
             </a:r>
             <a:r>
               <a:rPr lang="en-US" altLang="zh-TW" sz="2000" dirty="0">
@@ -6026,16 +6376,52 @@
                 </a:solidFill>
                 <a:latin typeface="Arial" panose="020B0604020202020204" pitchFamily="34" charset="0"/>
               </a:rPr>
-              <a:t>Op-machine</a:t>
-            </a:r>
-            <a:r>
-              <a:rPr lang="zh-TW" altLang="en-US" sz="2000" dirty="0">
-                <a:solidFill>
-                  <a:srgbClr val="222222"/>
-                </a:solidFill>
-                <a:latin typeface="Arial" panose="020B0604020202020204" pitchFamily="34" charset="0"/>
-              </a:rPr>
-              <a:t>為單位</a:t>
+              <a:t>:</a:t>
+            </a:r>
+            <a:r>
+              <a:rPr lang="zh-TW" altLang="en-US" sz="2000" dirty="0">
+                <a:solidFill>
+                  <a:srgbClr val="222222"/>
+                </a:solidFill>
+                <a:latin typeface="Arial" panose="020B0604020202020204" pitchFamily="34" charset="0"/>
+              </a:rPr>
+              <a:t> 所有未排</a:t>
+            </a:r>
+            <a:r>
+              <a:rPr lang="en-US" altLang="zh-TW" sz="2000" dirty="0">
+                <a:solidFill>
+                  <a:srgbClr val="222222"/>
+                </a:solidFill>
+                <a:latin typeface="Arial" panose="020B0604020202020204" pitchFamily="34" charset="0"/>
+              </a:rPr>
+              <a:t>job</a:t>
+            </a:r>
+            <a:r>
+              <a:rPr lang="zh-TW" altLang="en-US" sz="2000" dirty="0">
+                <a:solidFill>
+                  <a:srgbClr val="222222"/>
+                </a:solidFill>
+                <a:latin typeface="Arial" panose="020B0604020202020204" pitchFamily="34" charset="0"/>
+              </a:rPr>
+              <a:t>的</a:t>
+            </a:r>
+            <a:r>
+              <a:rPr lang="en-US" altLang="zh-TW" sz="2000" dirty="0">
+                <a:solidFill>
+                  <a:srgbClr val="222222"/>
+                </a:solidFill>
+                <a:latin typeface="Arial" panose="020B0604020202020204" pitchFamily="34" charset="0"/>
+              </a:rPr>
+              <a:t>slack</a:t>
+            </a:r>
+            <a:r>
+              <a:rPr lang="zh-TW" altLang="en-US" sz="2000" dirty="0">
+                <a:solidFill>
+                  <a:srgbClr val="222222"/>
+                </a:solidFill>
+                <a:latin typeface="Arial" panose="020B0604020202020204" pitchFamily="34" charset="0"/>
+              </a:rPr>
+              <a:t>標準差</a:t>
             </a:r>
             <a:endParaRPr lang="en-US" altLang="zh-TW" sz="2000" dirty="0">
               <a:solidFill>
@@ -6051,13 +6437,13 @@
               </a:lnSpc>
             </a:pPr>
             <a:r>
-              <a:rPr lang="en-US" altLang="zh-TW" sz="2000" dirty="0" err="1">
-                <a:solidFill>
-                  <a:srgbClr val="222222"/>
-                </a:solidFill>
-                <a:latin typeface="Arial" panose="020B0604020202020204" pitchFamily="34" charset="0"/>
-              </a:rPr>
-              <a:t>Pair_pt</a:t>
+              <a:rPr lang="zh-TW" altLang="en-US" sz="2000" dirty="0">
+                <a:solidFill>
+                  <a:srgbClr val="222222"/>
+                </a:solidFill>
+                <a:latin typeface="Arial" panose="020B0604020202020204" pitchFamily="34" charset="0"/>
+              </a:rPr>
+              <a:t>壅塞程度</a:t>
             </a:r>
             <a:r>
               <a:rPr lang="en-US" altLang="zh-TW" sz="2000" dirty="0">
@@ -6066,34 +6452,16 @@
                 </a:solidFill>
                 <a:latin typeface="Arial" panose="020B0604020202020204" pitchFamily="34" charset="0"/>
               </a:rPr>
-              <a:t> : </a:t>
-            </a:r>
-            <a:r>
-              <a:rPr lang="zh-TW" altLang="en-US" sz="2000" dirty="0">
-                <a:solidFill>
-                  <a:srgbClr val="222222"/>
-                </a:solidFill>
-                <a:latin typeface="Arial" panose="020B0604020202020204" pitchFamily="34" charset="0"/>
-              </a:rPr>
-              <a:t>該</a:t>
-            </a:r>
-            <a:r>
-              <a:rPr lang="en-US" altLang="zh-TW" sz="2000" dirty="0">
-                <a:solidFill>
-                  <a:srgbClr val="222222"/>
-                </a:solidFill>
-                <a:latin typeface="Arial" panose="020B0604020202020204" pitchFamily="34" charset="0"/>
-              </a:rPr>
-              <a:t>Op</a:t>
-            </a:r>
-            <a:r>
-              <a:rPr lang="zh-TW" altLang="en-US" sz="2000" dirty="0">
-                <a:solidFill>
-                  <a:srgbClr val="222222"/>
-                </a:solidFill>
-                <a:latin typeface="Arial" panose="020B0604020202020204" pitchFamily="34" charset="0"/>
-              </a:rPr>
-              <a:t>在該機台的加工時間</a:t>
+              <a:t>:</a:t>
+            </a:r>
+            <a:r>
+              <a:rPr lang="zh-TW" altLang="en-US" sz="2000" dirty="0">
+                <a:solidFill>
+                  <a:srgbClr val="222222"/>
+                </a:solidFill>
+                <a:latin typeface="Arial" panose="020B0604020202020204" pitchFamily="34" charset="0"/>
+              </a:rPr>
+              <a:t> 所有未排工單數與機台數的比值</a:t>
             </a:r>
             <a:endParaRPr lang="en-US" altLang="zh-TW" sz="2000" dirty="0">
               <a:solidFill>
@@ -6102,270 +6470,12 @@
               <a:latin typeface="Arial" panose="020B0604020202020204" pitchFamily="34" charset="0"/>
             </a:endParaRPr>
           </a:p>
-          <a:p>
-            <a:pPr>
-              <a:lnSpc>
-                <a:spcPct val="150000"/>
-              </a:lnSpc>
-            </a:pPr>
-            <a:r>
-              <a:rPr lang="en-US" altLang="zh-TW" sz="2000" dirty="0" err="1">
-                <a:solidFill>
-                  <a:srgbClr val="222222"/>
-                </a:solidFill>
-                <a:latin typeface="Arial" panose="020B0604020202020204" pitchFamily="34" charset="0"/>
-              </a:rPr>
-              <a:t>Pair_pt</a:t>
-            </a:r>
-            <a:r>
-              <a:rPr lang="zh-TW" altLang="en-US" sz="2000" dirty="0">
-                <a:solidFill>
-                  <a:srgbClr val="222222"/>
-                </a:solidFill>
-                <a:latin typeface="Arial" panose="020B0604020202020204" pitchFamily="34" charset="0"/>
-              </a:rPr>
-              <a:t>相對於該</a:t>
-            </a:r>
-            <a:r>
-              <a:rPr lang="en-US" altLang="zh-TW" sz="2000" dirty="0">
-                <a:solidFill>
-                  <a:srgbClr val="222222"/>
-                </a:solidFill>
-                <a:latin typeface="Arial" panose="020B0604020202020204" pitchFamily="34" charset="0"/>
-              </a:rPr>
-              <a:t>Op</a:t>
-            </a:r>
-            <a:r>
-              <a:rPr lang="zh-TW" altLang="en-US" sz="2000" dirty="0">
-                <a:solidFill>
-                  <a:srgbClr val="222222"/>
-                </a:solidFill>
-                <a:latin typeface="Arial" panose="020B0604020202020204" pitchFamily="34" charset="0"/>
-              </a:rPr>
-              <a:t>在所有機台的最大加工時間的比值</a:t>
-            </a:r>
-            <a:endParaRPr lang="en-US" altLang="zh-TW" sz="2000" dirty="0">
-              <a:solidFill>
-                <a:srgbClr val="222222"/>
-              </a:solidFill>
-              <a:latin typeface="Arial" panose="020B0604020202020204" pitchFamily="34" charset="0"/>
-            </a:endParaRPr>
-          </a:p>
-          <a:p>
-            <a:pPr>
-              <a:lnSpc>
-                <a:spcPct val="150000"/>
-              </a:lnSpc>
-            </a:pPr>
-            <a:r>
-              <a:rPr lang="en-US" altLang="zh-TW" sz="2000" dirty="0" err="1">
-                <a:solidFill>
-                  <a:srgbClr val="222222"/>
-                </a:solidFill>
-                <a:latin typeface="Arial" panose="020B0604020202020204" pitchFamily="34" charset="0"/>
-              </a:rPr>
-              <a:t>Pair_pt</a:t>
-            </a:r>
-            <a:r>
-              <a:rPr lang="zh-TW" altLang="en-US" sz="2000" dirty="0">
-                <a:solidFill>
-                  <a:srgbClr val="222222"/>
-                </a:solidFill>
-                <a:latin typeface="Arial" panose="020B0604020202020204" pitchFamily="34" charset="0"/>
-              </a:rPr>
-              <a:t>相對於該機台目前可選</a:t>
-            </a:r>
-            <a:r>
-              <a:rPr lang="en-US" altLang="zh-TW" sz="2000" dirty="0">
-                <a:solidFill>
-                  <a:srgbClr val="222222"/>
-                </a:solidFill>
-                <a:latin typeface="Arial" panose="020B0604020202020204" pitchFamily="34" charset="0"/>
-              </a:rPr>
-              <a:t>Op</a:t>
-            </a:r>
-            <a:r>
-              <a:rPr lang="zh-TW" altLang="en-US" sz="2000" dirty="0">
-                <a:solidFill>
-                  <a:srgbClr val="222222"/>
-                </a:solidFill>
-                <a:latin typeface="Arial" panose="020B0604020202020204" pitchFamily="34" charset="0"/>
-              </a:rPr>
-              <a:t>的最大加工時間的比值</a:t>
-            </a:r>
-            <a:endParaRPr lang="en-US" altLang="zh-TW" sz="2000" dirty="0">
-              <a:solidFill>
-                <a:srgbClr val="222222"/>
-              </a:solidFill>
-              <a:latin typeface="Arial" panose="020B0604020202020204" pitchFamily="34" charset="0"/>
-            </a:endParaRPr>
-          </a:p>
-          <a:p>
-            <a:pPr>
-              <a:lnSpc>
-                <a:spcPct val="150000"/>
-              </a:lnSpc>
-            </a:pPr>
-            <a:r>
-              <a:rPr lang="en-US" altLang="zh-TW" sz="2000" dirty="0" err="1">
-                <a:solidFill>
-                  <a:srgbClr val="222222"/>
-                </a:solidFill>
-                <a:latin typeface="Arial" panose="020B0604020202020204" pitchFamily="34" charset="0"/>
-              </a:rPr>
-              <a:t>Pair_pt</a:t>
-            </a:r>
-            <a:r>
-              <a:rPr lang="zh-TW" altLang="en-US" sz="2000" dirty="0">
-                <a:solidFill>
-                  <a:srgbClr val="222222"/>
-                </a:solidFill>
-                <a:latin typeface="Arial" panose="020B0604020202020204" pitchFamily="34" charset="0"/>
-              </a:rPr>
-              <a:t>相對於整個環境剩餘所有</a:t>
-            </a:r>
-            <a:r>
-              <a:rPr lang="en-US" altLang="zh-TW" sz="2000" dirty="0">
-                <a:solidFill>
-                  <a:srgbClr val="222222"/>
-                </a:solidFill>
-                <a:latin typeface="Arial" panose="020B0604020202020204" pitchFamily="34" charset="0"/>
-              </a:rPr>
-              <a:t>Op</a:t>
-            </a:r>
-            <a:r>
-              <a:rPr lang="zh-TW" altLang="en-US" sz="2000" dirty="0">
-                <a:solidFill>
-                  <a:srgbClr val="222222"/>
-                </a:solidFill>
-                <a:latin typeface="Arial" panose="020B0604020202020204" pitchFamily="34" charset="0"/>
-              </a:rPr>
-              <a:t>中的最大加工時間的比值</a:t>
-            </a:r>
-            <a:endParaRPr lang="en-US" altLang="zh-TW" sz="2000" dirty="0">
-              <a:solidFill>
-                <a:srgbClr val="222222"/>
-              </a:solidFill>
-              <a:latin typeface="Arial" panose="020B0604020202020204" pitchFamily="34" charset="0"/>
-            </a:endParaRPr>
-          </a:p>
-          <a:p>
-            <a:pPr>
-              <a:lnSpc>
-                <a:spcPct val="150000"/>
-              </a:lnSpc>
-            </a:pPr>
-            <a:r>
-              <a:rPr lang="en-US" altLang="zh-TW" sz="2000" dirty="0" err="1">
-                <a:solidFill>
-                  <a:srgbClr val="222222"/>
-                </a:solidFill>
-                <a:latin typeface="Arial" panose="020B0604020202020204" pitchFamily="34" charset="0"/>
-              </a:rPr>
-              <a:t>Pair_pt</a:t>
-            </a:r>
-            <a:r>
-              <a:rPr lang="zh-TW" altLang="en-US" sz="2000" dirty="0">
-                <a:solidFill>
-                  <a:srgbClr val="222222"/>
-                </a:solidFill>
-                <a:latin typeface="Arial" panose="020B0604020202020204" pitchFamily="34" charset="0"/>
-              </a:rPr>
-              <a:t>相對於該機台剩餘</a:t>
-            </a:r>
-            <a:r>
-              <a:rPr lang="en-US" altLang="zh-TW" sz="2000" dirty="0">
-                <a:solidFill>
-                  <a:srgbClr val="222222"/>
-                </a:solidFill>
-                <a:latin typeface="Arial" panose="020B0604020202020204" pitchFamily="34" charset="0"/>
-              </a:rPr>
-              <a:t>Op</a:t>
-            </a:r>
-            <a:r>
-              <a:rPr lang="zh-TW" altLang="en-US" sz="2000" dirty="0">
-                <a:solidFill>
-                  <a:srgbClr val="222222"/>
-                </a:solidFill>
-                <a:latin typeface="Arial" panose="020B0604020202020204" pitchFamily="34" charset="0"/>
-              </a:rPr>
-              <a:t>中的最大加工時間的比值</a:t>
-            </a:r>
-            <a:endParaRPr lang="en-US" altLang="zh-TW" sz="2000" dirty="0">
-              <a:solidFill>
-                <a:srgbClr val="222222"/>
-              </a:solidFill>
-              <a:latin typeface="Arial" panose="020B0604020202020204" pitchFamily="34" charset="0"/>
-            </a:endParaRPr>
-          </a:p>
-          <a:p>
-            <a:pPr>
-              <a:lnSpc>
-                <a:spcPct val="150000"/>
-              </a:lnSpc>
-            </a:pPr>
-            <a:r>
-              <a:rPr lang="en-US" altLang="zh-TW" sz="2000" dirty="0" err="1">
-                <a:solidFill>
-                  <a:srgbClr val="222222"/>
-                </a:solidFill>
-                <a:latin typeface="Arial" panose="020B0604020202020204" pitchFamily="34" charset="0"/>
-              </a:rPr>
-              <a:t>Pair_pt</a:t>
-            </a:r>
-            <a:r>
-              <a:rPr lang="zh-TW" altLang="en-US" sz="2000" dirty="0">
-                <a:solidFill>
-                  <a:srgbClr val="222222"/>
-                </a:solidFill>
-                <a:latin typeface="Arial" panose="020B0604020202020204" pitchFamily="34" charset="0"/>
-              </a:rPr>
-              <a:t>相對於所有</a:t>
-            </a:r>
-            <a:r>
-              <a:rPr lang="en-US" altLang="zh-TW" sz="2000" dirty="0">
-                <a:solidFill>
-                  <a:srgbClr val="222222"/>
-                </a:solidFill>
-                <a:latin typeface="Arial" panose="020B0604020202020204" pitchFamily="34" charset="0"/>
-              </a:rPr>
-              <a:t>pair</a:t>
-            </a:r>
-            <a:r>
-              <a:rPr lang="zh-TW" altLang="en-US" sz="2000" dirty="0">
-                <a:solidFill>
-                  <a:srgbClr val="222222"/>
-                </a:solidFill>
-                <a:latin typeface="Arial" panose="020B0604020202020204" pitchFamily="34" charset="0"/>
-              </a:rPr>
-              <a:t>中的最大加工時間的比值</a:t>
-            </a:r>
-            <a:endParaRPr lang="en-US" altLang="zh-TW" sz="2000" dirty="0">
-              <a:solidFill>
-                <a:srgbClr val="222222"/>
-              </a:solidFill>
-              <a:latin typeface="Arial" panose="020B0604020202020204" pitchFamily="34" charset="0"/>
-            </a:endParaRPr>
-          </a:p>
-          <a:p>
-            <a:pPr>
-              <a:lnSpc>
-                <a:spcPct val="150000"/>
-              </a:lnSpc>
-            </a:pPr>
-            <a:endParaRPr lang="en-US" altLang="zh-TW" sz="2000" dirty="0">
-              <a:solidFill>
-                <a:srgbClr val="222222"/>
-              </a:solidFill>
-              <a:latin typeface="Arial" panose="020B0604020202020204" pitchFamily="34" charset="0"/>
-            </a:endParaRPr>
-          </a:p>
         </p:txBody>
       </p:sp>
     </p:spTree>
     <p:extLst>
       <p:ext uri="{BB962C8B-B14F-4D97-AF65-F5344CB8AC3E}">
-        <p14:creationId xmlns:p14="http://schemas.microsoft.com/office/powerpoint/2010/main" val="576245246"/>
+        <p14:creationId xmlns:p14="http://schemas.microsoft.com/office/powerpoint/2010/main" val="2097886425"/>
       </p:ext>
     </p:extLst>
   </p:cSld>
@@ -6527,22 +6637,13 @@
               </a:lnSpc>
             </a:pPr>
             <a:r>
-              <a:rPr lang="en-US" altLang="zh-TW" sz="2000" dirty="0" err="1">
-                <a:solidFill>
-                  <a:srgbClr val="222222"/>
-                </a:solidFill>
-                <a:latin typeface="Arial" panose="020B0604020202020204" pitchFamily="34" charset="0"/>
-              </a:rPr>
-              <a:t>Pair_pt</a:t>
-            </a:r>
-            <a:r>
-              <a:rPr lang="zh-TW" altLang="en-US" sz="2000" dirty="0">
-                <a:solidFill>
-                  <a:srgbClr val="222222"/>
-                </a:solidFill>
-                <a:latin typeface="Arial" panose="020B0604020202020204" pitchFamily="34" charset="0"/>
-              </a:rPr>
-              <a:t>占整個 </a:t>
+              <a:rPr lang="zh-TW" altLang="en-US" sz="2000" dirty="0">
+                <a:solidFill>
+                  <a:srgbClr val="222222"/>
+                </a:solidFill>
+                <a:latin typeface="Arial" panose="020B0604020202020204" pitchFamily="34" charset="0"/>
+              </a:rPr>
+              <a:t> 以</a:t>
             </a:r>
             <a:r>
               <a:rPr lang="en-US" altLang="zh-TW" sz="2000" dirty="0">
@@ -6551,16 +6652,16 @@
                 </a:solidFill>
                 <a:latin typeface="Arial" panose="020B0604020202020204" pitchFamily="34" charset="0"/>
               </a:rPr>
-              <a:t>job </a:t>
-            </a:r>
-            <a:r>
-              <a:rPr lang="zh-TW" altLang="en-US" sz="2000" dirty="0">
-                <a:solidFill>
-                  <a:srgbClr val="222222"/>
-                </a:solidFill>
-                <a:latin typeface="Arial" panose="020B0604020202020204" pitchFamily="34" charset="0"/>
-              </a:rPr>
-              <a:t>剩餘工作量的比例</a:t>
+              <a:t>Op-machine</a:t>
+            </a:r>
+            <a:r>
+              <a:rPr lang="zh-TW" altLang="en-US" sz="2000" dirty="0">
+                <a:solidFill>
+                  <a:srgbClr val="222222"/>
+                </a:solidFill>
+                <a:latin typeface="Arial" panose="020B0604020202020204" pitchFamily="34" charset="0"/>
+              </a:rPr>
+              <a:t>為單位</a:t>
             </a:r>
             <a:endParaRPr lang="en-US" altLang="zh-TW" sz="2000" dirty="0">
               <a:solidFill>
@@ -6582,7 +6683,7 @@
                 </a:solidFill>
                 <a:latin typeface="Arial" panose="020B0604020202020204" pitchFamily="34" charset="0"/>
               </a:rPr>
-              <a:t>pair_wait_time</a:t>
+              <a:t>Pair_pt</a:t>
             </a:r>
             <a:r>
               <a:rPr lang="en-US" altLang="zh-TW" sz="2000" dirty="0">
@@ -6591,16 +6692,16 @@
                 </a:solidFill>
                 <a:latin typeface="Arial" panose="020B0604020202020204" pitchFamily="34" charset="0"/>
               </a:rPr>
-              <a:t>:</a:t>
-            </a:r>
-            <a:r>
-              <a:rPr lang="zh-TW" altLang="en-US" sz="2000" dirty="0">
-                <a:solidFill>
-                  <a:srgbClr val="222222"/>
-                </a:solidFill>
-                <a:latin typeface="Arial" panose="020B0604020202020204" pitchFamily="34" charset="0"/>
-              </a:rPr>
-              <a:t> 此</a:t>
+              <a:t> : </a:t>
+            </a:r>
+            <a:r>
+              <a:rPr lang="zh-TW" altLang="en-US" sz="2000" dirty="0">
+                <a:solidFill>
+                  <a:srgbClr val="222222"/>
+                </a:solidFill>
+                <a:latin typeface="Arial" panose="020B0604020202020204" pitchFamily="34" charset="0"/>
+              </a:rPr>
+              <a:t>該</a:t>
             </a:r>
             <a:r>
               <a:rPr lang="en-US" altLang="zh-TW" sz="2000" dirty="0">
@@ -6618,25 +6719,7 @@
                 </a:solidFill>
                 <a:latin typeface="Arial" panose="020B0604020202020204" pitchFamily="34" charset="0"/>
               </a:rPr>
-              <a:t>目前等待時間 </a:t>
-            </a:r>
-            <a:r>
-              <a:rPr lang="en-US" altLang="zh-TW" sz="2000" dirty="0">
-                <a:solidFill>
-                  <a:srgbClr val="222222"/>
-                </a:solidFill>
-                <a:latin typeface="Arial" panose="020B0604020202020204" pitchFamily="34" charset="0"/>
-              </a:rPr>
-              <a:t>+ </a:t>
-            </a:r>
-            <a:r>
-              <a:rPr lang="zh-TW" altLang="en-US" sz="2000" dirty="0">
-                <a:solidFill>
-                  <a:srgbClr val="222222"/>
-                </a:solidFill>
-                <a:latin typeface="Arial" panose="020B0604020202020204" pitchFamily="34" charset="0"/>
-              </a:rPr>
-              <a:t>此機台目前空閒時間</a:t>
+              <a:t>在該機台的加工時間</a:t>
             </a:r>
             <a:endParaRPr lang="en-US" altLang="zh-TW" sz="2000" dirty="0">
               <a:solidFill>
@@ -6658,7 +6741,16 @@
                 </a:solidFill>
                 <a:latin typeface="Arial" panose="020B0604020202020204" pitchFamily="34" charset="0"/>
               </a:rPr>
-              <a:t>pair_est_lateness</a:t>
+              <a:t>Pair_pt</a:t>
+            </a:r>
+            <a:r>
+              <a:rPr lang="zh-TW" altLang="en-US" sz="2000" dirty="0">
+                <a:solidFill>
+                  <a:srgbClr val="222222"/>
+                </a:solidFill>
+                <a:latin typeface="Arial" panose="020B0604020202020204" pitchFamily="34" charset="0"/>
+              </a:rPr>
+              <a:t>相對於該</a:t>
             </a:r>
             <a:r>
               <a:rPr lang="en-US" altLang="zh-TW" sz="2000" dirty="0">
@@ -6667,16 +6759,47 @@
                 </a:solidFill>
                 <a:latin typeface="Arial" panose="020B0604020202020204" pitchFamily="34" charset="0"/>
               </a:rPr>
-              <a:t>:</a:t>
-            </a:r>
-            <a:r>
-              <a:rPr lang="zh-TW" altLang="en-US" sz="2000" dirty="0">
-                <a:solidFill>
-                  <a:srgbClr val="222222"/>
-                </a:solidFill>
-                <a:latin typeface="Arial" panose="020B0604020202020204" pitchFamily="34" charset="0"/>
-              </a:rPr>
-              <a:t> </a:t>
+              <a:t>Op</a:t>
+            </a:r>
+            <a:r>
+              <a:rPr lang="zh-TW" altLang="en-US" sz="2000" dirty="0">
+                <a:solidFill>
+                  <a:srgbClr val="222222"/>
+                </a:solidFill>
+                <a:latin typeface="Arial" panose="020B0604020202020204" pitchFamily="34" charset="0"/>
+              </a:rPr>
+              <a:t>在所有機台的最大加工時間的比值</a:t>
+            </a:r>
+            <a:endParaRPr lang="en-US" altLang="zh-TW" sz="2000" dirty="0">
+              <a:solidFill>
+                <a:srgbClr val="222222"/>
+              </a:solidFill>
+              <a:latin typeface="Arial" panose="020B0604020202020204" pitchFamily="34" charset="0"/>
+            </a:endParaRPr>
+          </a:p>
+          <a:p>
+            <a:pPr>
+              <a:lnSpc>
+                <a:spcPct val="150000"/>
+              </a:lnSpc>
+            </a:pPr>
+            <a:r>
+              <a:rPr lang="en-US" altLang="zh-TW" sz="2000" dirty="0" err="1">
+                <a:solidFill>
+                  <a:srgbClr val="222222"/>
+                </a:solidFill>
+                <a:latin typeface="Arial" panose="020B0604020202020204" pitchFamily="34" charset="0"/>
+              </a:rPr>
+              <a:t>Pair_pt</a:t>
+            </a:r>
+            <a:r>
+              <a:rPr lang="zh-TW" altLang="en-US" sz="2000" dirty="0">
+                <a:solidFill>
+                  <a:srgbClr val="222222"/>
+                </a:solidFill>
+                <a:latin typeface="Arial" panose="020B0604020202020204" pitchFamily="34" charset="0"/>
+              </a:rPr>
+              <a:t>相對於該機台目前可選</a:t>
             </a:r>
             <a:r>
               <a:rPr lang="en-US" altLang="zh-TW" sz="2000" dirty="0">
@@ -6685,6 +6808,153 @@
                 </a:solidFill>
                 <a:latin typeface="Arial" panose="020B0604020202020204" pitchFamily="34" charset="0"/>
               </a:rPr>
+              <a:t>Op</a:t>
+            </a:r>
+            <a:r>
+              <a:rPr lang="zh-TW" altLang="en-US" sz="2000" dirty="0">
+                <a:solidFill>
+                  <a:srgbClr val="222222"/>
+                </a:solidFill>
+                <a:latin typeface="Arial" panose="020B0604020202020204" pitchFamily="34" charset="0"/>
+              </a:rPr>
+              <a:t>的最大加工時間的比值</a:t>
+            </a:r>
+            <a:endParaRPr lang="en-US" altLang="zh-TW" sz="2000" dirty="0">
+              <a:solidFill>
+                <a:srgbClr val="222222"/>
+              </a:solidFill>
+              <a:latin typeface="Arial" panose="020B0604020202020204" pitchFamily="34" charset="0"/>
+            </a:endParaRPr>
+          </a:p>
+          <a:p>
+            <a:pPr>
+              <a:lnSpc>
+                <a:spcPct val="150000"/>
+              </a:lnSpc>
+            </a:pPr>
+            <a:r>
+              <a:rPr lang="en-US" altLang="zh-TW" sz="2000" dirty="0" err="1">
+                <a:solidFill>
+                  <a:srgbClr val="222222"/>
+                </a:solidFill>
+                <a:latin typeface="Arial" panose="020B0604020202020204" pitchFamily="34" charset="0"/>
+              </a:rPr>
+              <a:t>Pair_pt</a:t>
+            </a:r>
+            <a:r>
+              <a:rPr lang="zh-TW" altLang="en-US" sz="2000" dirty="0">
+                <a:solidFill>
+                  <a:srgbClr val="222222"/>
+                </a:solidFill>
+                <a:latin typeface="Arial" panose="020B0604020202020204" pitchFamily="34" charset="0"/>
+              </a:rPr>
+              <a:t>相對於整個環境剩餘所有</a:t>
+            </a:r>
+            <a:r>
+              <a:rPr lang="en-US" altLang="zh-TW" sz="2000" dirty="0">
+                <a:solidFill>
+                  <a:srgbClr val="222222"/>
+                </a:solidFill>
+                <a:latin typeface="Arial" panose="020B0604020202020204" pitchFamily="34" charset="0"/>
+              </a:rPr>
+              <a:t>Op</a:t>
+            </a:r>
+            <a:r>
+              <a:rPr lang="zh-TW" altLang="en-US" sz="2000" dirty="0">
+                <a:solidFill>
+                  <a:srgbClr val="222222"/>
+                </a:solidFill>
+                <a:latin typeface="Arial" panose="020B0604020202020204" pitchFamily="34" charset="0"/>
+              </a:rPr>
+              <a:t>中的最大加工時間的比值</a:t>
+            </a:r>
+            <a:endParaRPr lang="en-US" altLang="zh-TW" sz="2000" dirty="0">
+              <a:solidFill>
+                <a:srgbClr val="222222"/>
+              </a:solidFill>
+              <a:latin typeface="Arial" panose="020B0604020202020204" pitchFamily="34" charset="0"/>
+            </a:endParaRPr>
+          </a:p>
+          <a:p>
+            <a:pPr>
+              <a:lnSpc>
+                <a:spcPct val="150000"/>
+              </a:lnSpc>
+            </a:pPr>
+            <a:r>
+              <a:rPr lang="en-US" altLang="zh-TW" sz="2000" dirty="0" err="1">
+                <a:solidFill>
+                  <a:srgbClr val="222222"/>
+                </a:solidFill>
+                <a:latin typeface="Arial" panose="020B0604020202020204" pitchFamily="34" charset="0"/>
+              </a:rPr>
+              <a:t>Pair_pt</a:t>
+            </a:r>
+            <a:r>
+              <a:rPr lang="zh-TW" altLang="en-US" sz="2000" dirty="0">
+                <a:solidFill>
+                  <a:srgbClr val="222222"/>
+                </a:solidFill>
+                <a:latin typeface="Arial" panose="020B0604020202020204" pitchFamily="34" charset="0"/>
+              </a:rPr>
+              <a:t>相對於該機台剩餘</a:t>
+            </a:r>
+            <a:r>
+              <a:rPr lang="en-US" altLang="zh-TW" sz="2000" dirty="0">
+                <a:solidFill>
+                  <a:srgbClr val="222222"/>
+                </a:solidFill>
+                <a:latin typeface="Arial" panose="020B0604020202020204" pitchFamily="34" charset="0"/>
+              </a:rPr>
+              <a:t>Op</a:t>
+            </a:r>
+            <a:r>
+              <a:rPr lang="zh-TW" altLang="en-US" sz="2000" dirty="0">
+                <a:solidFill>
+                  <a:srgbClr val="222222"/>
+                </a:solidFill>
+                <a:latin typeface="Arial" panose="020B0604020202020204" pitchFamily="34" charset="0"/>
+              </a:rPr>
+              <a:t>中的最大加工時間的比值</a:t>
+            </a:r>
+            <a:endParaRPr lang="en-US" altLang="zh-TW" sz="2000" dirty="0">
+              <a:solidFill>
+                <a:srgbClr val="222222"/>
+              </a:solidFill>
+              <a:latin typeface="Arial" panose="020B0604020202020204" pitchFamily="34" charset="0"/>
+            </a:endParaRPr>
+          </a:p>
+          <a:p>
+            <a:pPr>
+              <a:lnSpc>
+                <a:spcPct val="150000"/>
+              </a:lnSpc>
+            </a:pPr>
+            <a:r>
+              <a:rPr lang="en-US" altLang="zh-TW" sz="2000" dirty="0" err="1">
+                <a:solidFill>
+                  <a:srgbClr val="222222"/>
+                </a:solidFill>
+                <a:latin typeface="Arial" panose="020B0604020202020204" pitchFamily="34" charset="0"/>
+              </a:rPr>
+              <a:t>Pair_pt</a:t>
+            </a:r>
+            <a:r>
+              <a:rPr lang="zh-TW" altLang="en-US" sz="2000" dirty="0">
+                <a:solidFill>
+                  <a:srgbClr val="222222"/>
+                </a:solidFill>
+                <a:latin typeface="Arial" panose="020B0604020202020204" pitchFamily="34" charset="0"/>
+              </a:rPr>
+              <a:t>相對於所有</a:t>
+            </a:r>
+            <a:r>
+              <a:rPr lang="en-US" altLang="zh-TW" sz="2000" dirty="0">
+                <a:solidFill>
+                  <a:srgbClr val="222222"/>
+                </a:solidFill>
+                <a:latin typeface="Arial" panose="020B0604020202020204" pitchFamily="34" charset="0"/>
+              </a:rPr>
               <a:t>pair</a:t>
             </a:r>
             <a:r>
@@ -6694,71 +6964,14 @@
                 </a:solidFill>
                 <a:latin typeface="Arial" panose="020B0604020202020204" pitchFamily="34" charset="0"/>
               </a:rPr>
-              <a:t>最早可加工時間 </a:t>
-            </a:r>
-            <a:r>
-              <a:rPr lang="en-US" altLang="zh-TW" sz="2000" dirty="0">
-                <a:solidFill>
-                  <a:srgbClr val="222222"/>
-                </a:solidFill>
-                <a:latin typeface="Arial" panose="020B0604020202020204" pitchFamily="34" charset="0"/>
-              </a:rPr>
-              <a:t>+</a:t>
-            </a:r>
-            <a:r>
-              <a:rPr lang="zh-TW" altLang="en-US" sz="2000" dirty="0">
-                <a:solidFill>
-                  <a:srgbClr val="222222"/>
-                </a:solidFill>
-                <a:latin typeface="Arial" panose="020B0604020202020204" pitchFamily="34" charset="0"/>
-              </a:rPr>
-              <a:t> </a:t>
-            </a:r>
-            <a:r>
-              <a:rPr lang="en-US" altLang="zh-TW" sz="2000" dirty="0" err="1">
-                <a:solidFill>
-                  <a:srgbClr val="222222"/>
-                </a:solidFill>
-                <a:latin typeface="Arial" panose="020B0604020202020204" pitchFamily="34" charset="0"/>
-              </a:rPr>
-              <a:t>Pair_pt</a:t>
-            </a:r>
-            <a:r>
-              <a:rPr lang="zh-TW" altLang="en-US" sz="2000" dirty="0">
-                <a:solidFill>
-                  <a:srgbClr val="222222"/>
-                </a:solidFill>
-                <a:latin typeface="Arial" panose="020B0604020202020204" pitchFamily="34" charset="0"/>
-              </a:rPr>
-              <a:t> </a:t>
-            </a:r>
-            <a:r>
-              <a:rPr lang="en-US" altLang="zh-TW" sz="2000" dirty="0">
-                <a:solidFill>
-                  <a:srgbClr val="222222"/>
-                </a:solidFill>
-                <a:latin typeface="Arial" panose="020B0604020202020204" pitchFamily="34" charset="0"/>
-              </a:rPr>
-              <a:t>–</a:t>
-            </a:r>
-            <a:r>
-              <a:rPr lang="zh-TW" altLang="en-US" sz="2000" dirty="0">
-                <a:solidFill>
-                  <a:srgbClr val="222222"/>
-                </a:solidFill>
-                <a:latin typeface="Arial" panose="020B0604020202020204" pitchFamily="34" charset="0"/>
-              </a:rPr>
-              <a:t> </a:t>
-            </a:r>
-            <a:r>
-              <a:rPr lang="en-US" altLang="zh-TW" sz="2000" dirty="0">
-                <a:solidFill>
-                  <a:srgbClr val="222222"/>
-                </a:solidFill>
-                <a:latin typeface="Arial" panose="020B0604020202020204" pitchFamily="34" charset="0"/>
-              </a:rPr>
-              <a:t>due date</a:t>
-            </a:r>
+              <a:t>中的最大加工時間的比值</a:t>
+            </a:r>
+            <a:endParaRPr lang="en-US" altLang="zh-TW" sz="2000" dirty="0">
+              <a:solidFill>
+                <a:srgbClr val="222222"/>
+              </a:solidFill>
+              <a:latin typeface="Arial" panose="020B0604020202020204" pitchFamily="34" charset="0"/>
+            </a:endParaRPr>
           </a:p>
           <a:p>
             <a:pPr>
@@ -6773,25 +6986,12 @@
               <a:latin typeface="Arial" panose="020B0604020202020204" pitchFamily="34" charset="0"/>
             </a:endParaRPr>
           </a:p>
-          <a:p>
-            <a:pPr>
-              <a:lnSpc>
-                <a:spcPct val="150000"/>
-              </a:lnSpc>
-            </a:pPr>
-            <a:endParaRPr lang="en-US" altLang="zh-TW" sz="2000" dirty="0">
-              <a:solidFill>
-                <a:srgbClr val="222222"/>
-              </a:solidFill>
-              <a:latin typeface="Arial" panose="020B0604020202020204" pitchFamily="34" charset="0"/>
-            </a:endParaRPr>
-          </a:p>
         </p:txBody>
       </p:sp>
     </p:spTree>
     <p:extLst>
       <p:ext uri="{BB962C8B-B14F-4D97-AF65-F5344CB8AC3E}">
-        <p14:creationId xmlns:p14="http://schemas.microsoft.com/office/powerpoint/2010/main" val="2427644523"/>
+        <p14:creationId xmlns:p14="http://schemas.microsoft.com/office/powerpoint/2010/main" val="576245246"/>
       </p:ext>
     </p:extLst>
   </p:cSld>
@@ -6845,7 +7045,15 @@
             </a:r>
             <a:r>
               <a:rPr lang="en-US" altLang="zh-TW" dirty="0"/>
-              <a:t>reward</a:t>
+              <a:t>state -Pair</a:t>
+            </a:r>
+            <a:r>
+              <a:rPr lang="zh-TW" altLang="en-US" dirty="0"/>
+              <a:t> </a:t>
+            </a:r>
+            <a:r>
+              <a:rPr lang="en-US" altLang="zh-TW" dirty="0"/>
+              <a:t>state</a:t>
             </a:r>
             <a:endParaRPr lang="zh-TW" altLang="en-US" dirty="0"/>
           </a:p>
@@ -6945,13 +7153,22 @@
               </a:lnSpc>
             </a:pPr>
             <a:r>
-              <a:rPr lang="zh-TW" altLang="en-US" sz="2000" dirty="0">
-                <a:solidFill>
-                  <a:srgbClr val="222222"/>
-                </a:solidFill>
-                <a:latin typeface="Arial" panose="020B0604020202020204" pitchFamily="34" charset="0"/>
-              </a:rPr>
-              <a:t>總</a:t>
+              <a:rPr lang="en-US" altLang="zh-TW" sz="2000" dirty="0" err="1">
+                <a:solidFill>
+                  <a:srgbClr val="222222"/>
+                </a:solidFill>
+                <a:latin typeface="Arial" panose="020B0604020202020204" pitchFamily="34" charset="0"/>
+              </a:rPr>
+              <a:t>Pair_pt</a:t>
+            </a:r>
+            <a:r>
+              <a:rPr lang="zh-TW" altLang="en-US" sz="2000" dirty="0">
+                <a:solidFill>
+                  <a:srgbClr val="222222"/>
+                </a:solidFill>
+                <a:latin typeface="Arial" panose="020B0604020202020204" pitchFamily="34" charset="0"/>
+              </a:rPr>
+              <a:t>占整個 </a:t>
             </a:r>
             <a:r>
               <a:rPr lang="en-US" altLang="zh-TW" sz="2000" dirty="0">
@@ -6960,79 +7177,16 @@
                 </a:solidFill>
                 <a:latin typeface="Arial" panose="020B0604020202020204" pitchFamily="34" charset="0"/>
               </a:rPr>
-              <a:t>reward = (</a:t>
-            </a:r>
-            <a:r>
-              <a:rPr lang="en-US" altLang="zh-TW" sz="2000" dirty="0" err="1">
-                <a:solidFill>
-                  <a:srgbClr val="222222"/>
-                </a:solidFill>
-                <a:latin typeface="Arial" panose="020B0604020202020204" pitchFamily="34" charset="0"/>
-              </a:rPr>
-              <a:t>reward_mk</a:t>
-            </a:r>
-            <a:r>
-              <a:rPr lang="en-US" altLang="zh-TW" sz="2000" dirty="0">
-                <a:solidFill>
-                  <a:srgbClr val="222222"/>
-                </a:solidFill>
-                <a:latin typeface="Arial" panose="020B0604020202020204" pitchFamily="34" charset="0"/>
-              </a:rPr>
-              <a:t> + </a:t>
-            </a:r>
-            <a:r>
-              <a:rPr lang="en-US" altLang="zh-TW" sz="2000" dirty="0" err="1">
-                <a:solidFill>
-                  <a:srgbClr val="222222"/>
-                </a:solidFill>
-                <a:latin typeface="Arial" panose="020B0604020202020204" pitchFamily="34" charset="0"/>
-              </a:rPr>
-              <a:t>reward_td</a:t>
-            </a:r>
-            <a:r>
-              <a:rPr lang="en-US" altLang="zh-TW" sz="2000" dirty="0">
-                <a:solidFill>
-                  <a:srgbClr val="222222"/>
-                </a:solidFill>
-                <a:latin typeface="Arial" panose="020B0604020202020204" pitchFamily="34" charset="0"/>
-              </a:rPr>
-              <a:t>) / </a:t>
-            </a:r>
-            <a:r>
-              <a:rPr lang="en-US" altLang="zh-TW" sz="2000" dirty="0" err="1">
-                <a:solidFill>
-                  <a:srgbClr val="222222"/>
-                </a:solidFill>
-                <a:latin typeface="Arial" panose="020B0604020202020204" pitchFamily="34" charset="0"/>
-              </a:rPr>
-              <a:t>n_j</a:t>
-            </a:r>
-            <a:r>
-              <a:rPr lang="zh-TW" altLang="en-US" sz="2000" dirty="0">
-                <a:solidFill>
-                  <a:srgbClr val="222222"/>
-                </a:solidFill>
-                <a:latin typeface="Arial" panose="020B0604020202020204" pitchFamily="34" charset="0"/>
-              </a:rPr>
-              <a:t>  、 除以</a:t>
-            </a:r>
-            <a:r>
-              <a:rPr lang="en-US" altLang="zh-TW" sz="2000" dirty="0" err="1">
-                <a:solidFill>
-                  <a:srgbClr val="222222"/>
-                </a:solidFill>
-                <a:latin typeface="Arial" panose="020B0604020202020204" pitchFamily="34" charset="0"/>
-              </a:rPr>
-              <a:t>n_j</a:t>
-            </a:r>
-            <a:r>
-              <a:rPr lang="zh-TW" altLang="en-US" sz="2000" dirty="0">
-                <a:solidFill>
-                  <a:srgbClr val="222222"/>
-                </a:solidFill>
-                <a:latin typeface="Arial" panose="020B0604020202020204" pitchFamily="34" charset="0"/>
-              </a:rPr>
-              <a:t>為了在課程式學習中適應不同大小</a:t>
+              <a:t>job </a:t>
+            </a:r>
+            <a:r>
+              <a:rPr lang="zh-TW" altLang="en-US" sz="2000" dirty="0">
+                <a:solidFill>
+                  <a:srgbClr val="222222"/>
+                </a:solidFill>
+                <a:latin typeface="Arial" panose="020B0604020202020204" pitchFamily="34" charset="0"/>
+              </a:rPr>
+              <a:t>剩餘工作量的比例</a:t>
             </a:r>
             <a:endParaRPr lang="en-US" altLang="zh-TW" sz="2000" dirty="0">
               <a:solidFill>
@@ -7054,7 +7208,7 @@
                 </a:solidFill>
                 <a:latin typeface="Arial" panose="020B0604020202020204" pitchFamily="34" charset="0"/>
               </a:rPr>
-              <a:t>reward_mk</a:t>
+              <a:t>pair_wait_time</a:t>
             </a:r>
             <a:r>
               <a:rPr lang="en-US" altLang="zh-TW" sz="2000" dirty="0">
@@ -7063,16 +7217,16 @@
                 </a:solidFill>
                 <a:latin typeface="Arial" panose="020B0604020202020204" pitchFamily="34" charset="0"/>
               </a:rPr>
-              <a:t> = </a:t>
-            </a:r>
-            <a:r>
-              <a:rPr lang="zh-TW" altLang="en-US" sz="2000" dirty="0">
-                <a:solidFill>
-                  <a:srgbClr val="222222"/>
-                </a:solidFill>
-                <a:latin typeface="Arial" panose="020B0604020202020204" pitchFamily="34" charset="0"/>
-              </a:rPr>
-              <a:t>上步的</a:t>
+              <a:t>:</a:t>
+            </a:r>
+            <a:r>
+              <a:rPr lang="zh-TW" altLang="en-US" sz="2000" dirty="0">
+                <a:solidFill>
+                  <a:srgbClr val="222222"/>
+                </a:solidFill>
+                <a:latin typeface="Arial" panose="020B0604020202020204" pitchFamily="34" charset="0"/>
+              </a:rPr>
+              <a:t> 此</a:t>
             </a:r>
             <a:r>
               <a:rPr lang="en-US" altLang="zh-TW" sz="2000" dirty="0">
@@ -7081,16 +7235,16 @@
                 </a:solidFill>
                 <a:latin typeface="Arial" panose="020B0604020202020204" pitchFamily="34" charset="0"/>
               </a:rPr>
-              <a:t>MK</a:t>
-            </a:r>
-            <a:r>
-              <a:rPr lang="zh-TW" altLang="en-US" sz="2000" dirty="0">
-                <a:solidFill>
-                  <a:srgbClr val="222222"/>
-                </a:solidFill>
-                <a:latin typeface="Arial" panose="020B0604020202020204" pitchFamily="34" charset="0"/>
-              </a:rPr>
-              <a:t>下限 </a:t>
+              <a:t>Op</a:t>
+            </a:r>
+            <a:r>
+              <a:rPr lang="zh-TW" altLang="en-US" sz="2000" dirty="0">
+                <a:solidFill>
+                  <a:srgbClr val="222222"/>
+                </a:solidFill>
+                <a:latin typeface="Arial" panose="020B0604020202020204" pitchFamily="34" charset="0"/>
+              </a:rPr>
+              <a:t>目前等待時間 </a:t>
             </a:r>
             <a:r>
               <a:rPr lang="en-US" altLang="zh-TW" sz="2000" dirty="0">
@@ -7099,266 +7253,16 @@
                 </a:solidFill>
                 <a:latin typeface="Arial" panose="020B0604020202020204" pitchFamily="34" charset="0"/>
               </a:rPr>
-              <a:t>–</a:t>
-            </a:r>
-            <a:r>
-              <a:rPr lang="zh-TW" altLang="en-US" sz="2000" dirty="0">
-                <a:solidFill>
-                  <a:srgbClr val="222222"/>
-                </a:solidFill>
-                <a:latin typeface="Arial" panose="020B0604020202020204" pitchFamily="34" charset="0"/>
-              </a:rPr>
-              <a:t> 這步的</a:t>
-            </a:r>
-            <a:r>
-              <a:rPr lang="en-US" altLang="zh-TW" sz="2000" dirty="0">
-                <a:solidFill>
-                  <a:srgbClr val="222222"/>
-                </a:solidFill>
-                <a:latin typeface="Arial" panose="020B0604020202020204" pitchFamily="34" charset="0"/>
-              </a:rPr>
-              <a:t>MK</a:t>
-            </a:r>
-            <a:r>
-              <a:rPr lang="zh-TW" altLang="en-US" sz="2000" dirty="0">
-                <a:solidFill>
-                  <a:srgbClr val="222222"/>
-                </a:solidFill>
-                <a:latin typeface="Arial" panose="020B0604020202020204" pitchFamily="34" charset="0"/>
-              </a:rPr>
-              <a:t>下限  </a:t>
-            </a:r>
-            <a:r>
-              <a:rPr lang="en-US" altLang="zh-TW" sz="2000" dirty="0">
-                <a:solidFill>
-                  <a:srgbClr val="222222"/>
-                </a:solidFill>
-                <a:latin typeface="Arial" panose="020B0604020202020204" pitchFamily="34" charset="0"/>
-              </a:rPr>
-              <a:t>(</a:t>
-            </a:r>
-            <a:r>
-              <a:rPr lang="zh-TW" altLang="en-US" sz="2000" dirty="0">
-                <a:solidFill>
-                  <a:srgbClr val="222222"/>
-                </a:solidFill>
-                <a:latin typeface="Arial" panose="020B0604020202020204" pitchFamily="34" charset="0"/>
-              </a:rPr>
-              <a:t>論文中的時間單位為一個平均加工時間</a:t>
-            </a:r>
-            <a:r>
-              <a:rPr lang="en-US" altLang="zh-TW" sz="2000" dirty="0">
-                <a:solidFill>
-                  <a:srgbClr val="222222"/>
-                </a:solidFill>
-                <a:latin typeface="Arial" panose="020B0604020202020204" pitchFamily="34" charset="0"/>
-              </a:rPr>
-              <a:t>)</a:t>
-            </a:r>
-          </a:p>
-          <a:p>
-            <a:pPr>
-              <a:lnSpc>
-                <a:spcPct val="150000"/>
-              </a:lnSpc>
-            </a:pPr>
-            <a:r>
-              <a:rPr lang="zh-TW" altLang="en-US" sz="2000" dirty="0">
-                <a:solidFill>
-                  <a:srgbClr val="222222"/>
-                </a:solidFill>
-                <a:latin typeface="Arial" panose="020B0604020202020204" pitchFamily="34" charset="0"/>
-              </a:rPr>
-              <a:t> </a:t>
-            </a:r>
-            <a:r>
-              <a:rPr lang="en-US" altLang="zh-TW" sz="2000" dirty="0">
-                <a:solidFill>
-                  <a:srgbClr val="222222"/>
-                </a:solidFill>
-                <a:latin typeface="Arial" panose="020B0604020202020204" pitchFamily="34" charset="0"/>
-              </a:rPr>
-              <a:t>MK</a:t>
-            </a:r>
-            <a:r>
-              <a:rPr lang="zh-TW" altLang="en-US" sz="2000" dirty="0">
-                <a:solidFill>
-                  <a:srgbClr val="222222"/>
-                </a:solidFill>
-                <a:latin typeface="Arial" panose="020B0604020202020204" pitchFamily="34" charset="0"/>
-              </a:rPr>
-              <a:t>下限為 新全局下限 </a:t>
-            </a:r>
-            <a:r>
-              <a:rPr lang="en-US" altLang="zh-TW" sz="2000" dirty="0">
-                <a:solidFill>
-                  <a:srgbClr val="222222"/>
-                </a:solidFill>
-                <a:latin typeface="Arial" panose="020B0604020202020204" pitchFamily="34" charset="0"/>
-              </a:rPr>
-              <a:t>= max(</a:t>
-            </a:r>
-            <a:r>
-              <a:rPr lang="zh-TW" altLang="en-US" sz="2000" dirty="0">
-                <a:solidFill>
-                  <a:srgbClr val="222222"/>
-                </a:solidFill>
-                <a:latin typeface="Arial" panose="020B0604020202020204" pitchFamily="34" charset="0"/>
-              </a:rPr>
-              <a:t>其他 </a:t>
-            </a:r>
-            <a:r>
-              <a:rPr lang="en-US" altLang="zh-TW" sz="2000" dirty="0">
-                <a:solidFill>
-                  <a:srgbClr val="222222"/>
-                </a:solidFill>
-                <a:latin typeface="Arial" panose="020B0604020202020204" pitchFamily="34" charset="0"/>
-              </a:rPr>
-              <a:t>job </a:t>
-            </a:r>
-            <a:r>
-              <a:rPr lang="zh-TW" altLang="en-US" sz="2000" dirty="0">
-                <a:solidFill>
-                  <a:srgbClr val="222222"/>
-                </a:solidFill>
-                <a:latin typeface="Arial" panose="020B0604020202020204" pitchFamily="34" charset="0"/>
-              </a:rPr>
-              <a:t>原本的下界限 </a:t>
-            </a:r>
-            <a:r>
-              <a:rPr lang="en-US" altLang="zh-TW" sz="2000" dirty="0">
-                <a:solidFill>
-                  <a:srgbClr val="222222"/>
-                </a:solidFill>
-                <a:latin typeface="Arial" panose="020B0604020202020204" pitchFamily="34" charset="0"/>
-              </a:rPr>
-              <a:t>,</a:t>
-            </a:r>
-            <a:r>
-              <a:rPr lang="en-US" altLang="zh-TW" sz="2000" dirty="0" err="1">
-                <a:solidFill>
-                  <a:srgbClr val="222222"/>
-                </a:solidFill>
-                <a:latin typeface="Arial" panose="020B0604020202020204" pitchFamily="34" charset="0"/>
-              </a:rPr>
-              <a:t>job_j</a:t>
-            </a:r>
-            <a:r>
-              <a:rPr lang="en-US" altLang="zh-TW" sz="2000" dirty="0">
-                <a:solidFill>
-                  <a:srgbClr val="222222"/>
-                </a:solidFill>
-                <a:latin typeface="Arial" panose="020B0604020202020204" pitchFamily="34" charset="0"/>
-              </a:rPr>
-              <a:t> </a:t>
-            </a:r>
-            <a:r>
-              <a:rPr lang="zh-TW" altLang="en-US" sz="2000" dirty="0">
-                <a:solidFill>
-                  <a:srgbClr val="222222"/>
-                </a:solidFill>
-                <a:latin typeface="Arial" panose="020B0604020202020204" pitchFamily="34" charset="0"/>
-              </a:rPr>
-              <a:t>更新後的新下限</a:t>
-            </a:r>
-            <a:r>
-              <a:rPr lang="en-US" altLang="zh-TW" sz="2000" dirty="0">
-                <a:solidFill>
-                  <a:srgbClr val="222222"/>
-                </a:solidFill>
-                <a:latin typeface="Arial" panose="020B0604020202020204" pitchFamily="34" charset="0"/>
-              </a:rPr>
-              <a:t>)</a:t>
-            </a:r>
-            <a:r>
-              <a:rPr lang="zh-TW" altLang="en-US" sz="2000" dirty="0">
-                <a:solidFill>
-                  <a:srgbClr val="222222"/>
-                </a:solidFill>
-                <a:latin typeface="Arial" panose="020B0604020202020204" pitchFamily="34" charset="0"/>
-              </a:rPr>
-              <a:t>，而在排</a:t>
-            </a:r>
-            <a:r>
-              <a:rPr lang="en-US" altLang="zh-TW" sz="2000" dirty="0" err="1">
-                <a:solidFill>
-                  <a:srgbClr val="222222"/>
-                </a:solidFill>
-                <a:latin typeface="Arial" panose="020B0604020202020204" pitchFamily="34" charset="0"/>
-              </a:rPr>
-              <a:t>job_j</a:t>
-            </a:r>
-            <a:r>
-              <a:rPr lang="zh-TW" altLang="en-US" sz="2000" dirty="0">
-                <a:solidFill>
-                  <a:srgbClr val="222222"/>
-                </a:solidFill>
-                <a:latin typeface="Arial" panose="020B0604020202020204" pitchFamily="34" charset="0"/>
-              </a:rPr>
-              <a:t>時只會更新</a:t>
-            </a:r>
-            <a:r>
-              <a:rPr lang="en-US" altLang="zh-TW" sz="2000" dirty="0" err="1">
-                <a:solidFill>
-                  <a:srgbClr val="222222"/>
-                </a:solidFill>
-                <a:latin typeface="Arial" panose="020B0604020202020204" pitchFamily="34" charset="0"/>
-              </a:rPr>
-              <a:t>job_j</a:t>
-            </a:r>
-            <a:r>
-              <a:rPr lang="zh-TW" altLang="en-US" sz="2000" dirty="0">
-                <a:solidFill>
-                  <a:srgbClr val="222222"/>
-                </a:solidFill>
-                <a:latin typeface="Arial" panose="020B0604020202020204" pitchFamily="34" charset="0"/>
-              </a:rPr>
-              <a:t>下限，所以當</a:t>
-            </a:r>
-            <a:r>
-              <a:rPr lang="en-US" altLang="zh-TW" sz="2000" dirty="0" err="1">
-                <a:solidFill>
-                  <a:srgbClr val="222222"/>
-                </a:solidFill>
-                <a:latin typeface="Arial" panose="020B0604020202020204" pitchFamily="34" charset="0"/>
-              </a:rPr>
-              <a:t>job_j</a:t>
-            </a:r>
-            <a:r>
-              <a:rPr lang="zh-TW" altLang="en-US" sz="2000" dirty="0">
-                <a:solidFill>
-                  <a:srgbClr val="222222"/>
-                </a:solidFill>
-                <a:latin typeface="Arial" panose="020B0604020202020204" pitchFamily="34" charset="0"/>
-              </a:rPr>
-              <a:t>下限更新後沒有比其他 </a:t>
-            </a:r>
-            <a:r>
-              <a:rPr lang="en-US" altLang="zh-TW" sz="2000" dirty="0">
-                <a:solidFill>
-                  <a:srgbClr val="222222"/>
-                </a:solidFill>
-                <a:latin typeface="Arial" panose="020B0604020202020204" pitchFamily="34" charset="0"/>
-              </a:rPr>
-              <a:t>job </a:t>
-            </a:r>
-            <a:r>
-              <a:rPr lang="zh-TW" altLang="en-US" sz="2000" dirty="0">
-                <a:solidFill>
-                  <a:srgbClr val="222222"/>
-                </a:solidFill>
-                <a:latin typeface="Arial" panose="020B0604020202020204" pitchFamily="34" charset="0"/>
-              </a:rPr>
-              <a:t>原本的下界限</a:t>
-            </a:r>
-            <a:r>
-              <a:rPr lang="zh-TW" altLang="en-US" sz="2000">
-                <a:solidFill>
-                  <a:srgbClr val="222222"/>
-                </a:solidFill>
-                <a:latin typeface="Arial" panose="020B0604020202020204" pitchFamily="34" charset="0"/>
-              </a:rPr>
-              <a:t>大，新全局下限會一樣。</a:t>
+              <a:t>+ </a:t>
+            </a:r>
+            <a:r>
+              <a:rPr lang="zh-TW" altLang="en-US" sz="2000" dirty="0">
+                <a:solidFill>
+                  <a:srgbClr val="222222"/>
+                </a:solidFill>
+                <a:latin typeface="Arial" panose="020B0604020202020204" pitchFamily="34" charset="0"/>
+              </a:rPr>
+              <a:t>此機台目前空閒時間</a:t>
             </a:r>
             <a:endParaRPr lang="en-US" altLang="zh-TW" sz="2000" dirty="0">
               <a:solidFill>
@@ -7380,7 +7284,7 @@
                 </a:solidFill>
                 <a:latin typeface="Arial" panose="020B0604020202020204" pitchFamily="34" charset="0"/>
               </a:rPr>
-              <a:t>reward_td</a:t>
+              <a:t>pair_est_lateness</a:t>
             </a:r>
             <a:r>
               <a:rPr lang="en-US" altLang="zh-TW" sz="2000" dirty="0">
@@ -7389,7 +7293,52 @@
                 </a:solidFill>
                 <a:latin typeface="Arial" panose="020B0604020202020204" pitchFamily="34" charset="0"/>
               </a:rPr>
-              <a:t> = - alpha * (tardiness / </a:t>
+              <a:t>:</a:t>
+            </a:r>
+            <a:r>
+              <a:rPr lang="zh-TW" altLang="en-US" sz="2000" dirty="0">
+                <a:solidFill>
+                  <a:srgbClr val="222222"/>
+                </a:solidFill>
+                <a:latin typeface="Arial" panose="020B0604020202020204" pitchFamily="34" charset="0"/>
+              </a:rPr>
+              <a:t> </a:t>
+            </a:r>
+            <a:r>
+              <a:rPr lang="en-US" altLang="zh-TW" sz="2000" dirty="0">
+                <a:solidFill>
+                  <a:srgbClr val="222222"/>
+                </a:solidFill>
+                <a:latin typeface="Arial" panose="020B0604020202020204" pitchFamily="34" charset="0"/>
+              </a:rPr>
+              <a:t>pair</a:t>
+            </a:r>
+            <a:r>
+              <a:rPr lang="zh-TW" altLang="en-US" sz="2000" dirty="0">
+                <a:solidFill>
+                  <a:srgbClr val="222222"/>
+                </a:solidFill>
+                <a:latin typeface="Arial" panose="020B0604020202020204" pitchFamily="34" charset="0"/>
+              </a:rPr>
+              <a:t>最早可加工時間 </a:t>
+            </a:r>
+            <a:r>
+              <a:rPr lang="en-US" altLang="zh-TW" sz="2000" dirty="0">
+                <a:solidFill>
+                  <a:srgbClr val="222222"/>
+                </a:solidFill>
+                <a:latin typeface="Arial" panose="020B0604020202020204" pitchFamily="34" charset="0"/>
+              </a:rPr>
+              <a:t>+</a:t>
+            </a:r>
+            <a:r>
+              <a:rPr lang="zh-TW" altLang="en-US" sz="2000" dirty="0">
+                <a:solidFill>
+                  <a:srgbClr val="222222"/>
+                </a:solidFill>
+                <a:latin typeface="Arial" panose="020B0604020202020204" pitchFamily="34" charset="0"/>
+              </a:rPr>
+              <a:t> </a:t>
             </a:r>
             <a:r>
               <a:rPr lang="en-US" altLang="zh-TW" sz="2000" dirty="0" err="1">
@@ -7398,7 +7347,16 @@
                 </a:solidFill>
                 <a:latin typeface="Arial" panose="020B0604020202020204" pitchFamily="34" charset="0"/>
               </a:rPr>
-              <a:t>mean_op_pt</a:t>
+              <a:t>Pair_pt</a:t>
+            </a:r>
+            <a:r>
+              <a:rPr lang="zh-TW" altLang="en-US" sz="2000" dirty="0">
+                <a:solidFill>
+                  <a:srgbClr val="222222"/>
+                </a:solidFill>
+                <a:latin typeface="Arial" panose="020B0604020202020204" pitchFamily="34" charset="0"/>
+              </a:rPr>
+              <a:t> </a:t>
             </a:r>
             <a:r>
               <a:rPr lang="en-US" altLang="zh-TW" sz="2000" dirty="0">
@@ -7407,7 +7365,25 @@
                 </a:solidFill>
                 <a:latin typeface="Arial" panose="020B0604020202020204" pitchFamily="34" charset="0"/>
               </a:rPr>
-              <a:t> )</a:t>
+              <a:t>–</a:t>
+            </a:r>
+            <a:r>
+              <a:rPr lang="zh-TW" altLang="en-US" sz="2000" dirty="0">
+                <a:solidFill>
+                  <a:srgbClr val="222222"/>
+                </a:solidFill>
+                <a:latin typeface="Arial" panose="020B0604020202020204" pitchFamily="34" charset="0"/>
+              </a:rPr>
+              <a:t> </a:t>
+            </a:r>
+            <a:r>
+              <a:rPr lang="en-US" altLang="zh-TW" sz="2000" dirty="0">
+                <a:solidFill>
+                  <a:srgbClr val="222222"/>
+                </a:solidFill>
+                <a:latin typeface="Arial" panose="020B0604020202020204" pitchFamily="34" charset="0"/>
+              </a:rPr>
+              <a:t>due date</a:t>
             </a:r>
           </a:p>
           <a:p>
@@ -7416,49 +7392,32 @@
                 <a:spcPct val="150000"/>
               </a:lnSpc>
             </a:pPr>
-            <a:r>
-              <a:rPr lang="zh-TW" altLang="en-US" sz="2000" dirty="0">
-                <a:solidFill>
-                  <a:srgbClr val="222222"/>
-                </a:solidFill>
-                <a:latin typeface="Arial" panose="020B0604020202020204" pitchFamily="34" charset="0"/>
-              </a:rPr>
-              <a:t>除以 </a:t>
-            </a:r>
-            <a:r>
-              <a:rPr lang="en-US" altLang="zh-TW" sz="2000" dirty="0" err="1">
-                <a:solidFill>
-                  <a:srgbClr val="222222"/>
-                </a:solidFill>
-                <a:latin typeface="Arial" panose="020B0604020202020204" pitchFamily="34" charset="0"/>
-              </a:rPr>
-              <a:t>mean_op_pt</a:t>
-            </a:r>
-            <a:r>
-              <a:rPr lang="zh-TW" altLang="en-US" sz="2000" dirty="0">
-                <a:solidFill>
-                  <a:srgbClr val="222222"/>
-                </a:solidFill>
-                <a:latin typeface="Arial" panose="020B0604020202020204" pitchFamily="34" charset="0"/>
-              </a:rPr>
-              <a:t>對齊</a:t>
-            </a:r>
-            <a:r>
-              <a:rPr lang="en-US" altLang="zh-TW" sz="2000" dirty="0">
-                <a:solidFill>
-                  <a:srgbClr val="222222"/>
-                </a:solidFill>
-                <a:latin typeface="Arial" panose="020B0604020202020204" pitchFamily="34" charset="0"/>
-              </a:rPr>
-              <a:t>MK</a:t>
-            </a:r>
+            <a:endParaRPr lang="en-US" altLang="zh-TW" sz="2000" dirty="0">
+              <a:solidFill>
+                <a:srgbClr val="222222"/>
+              </a:solidFill>
+              <a:latin typeface="Arial" panose="020B0604020202020204" pitchFamily="34" charset="0"/>
+            </a:endParaRPr>
+          </a:p>
+          <a:p>
+            <a:pPr>
+              <a:lnSpc>
+                <a:spcPct val="150000"/>
+              </a:lnSpc>
+            </a:pPr>
+            <a:endParaRPr lang="en-US" altLang="zh-TW" sz="2000" dirty="0">
+              <a:solidFill>
+                <a:srgbClr val="222222"/>
+              </a:solidFill>
+              <a:latin typeface="Arial" panose="020B0604020202020204" pitchFamily="34" charset="0"/>
+            </a:endParaRPr>
           </a:p>
         </p:txBody>
       </p:sp>
     </p:spTree>
     <p:extLst>
       <p:ext uri="{BB962C8B-B14F-4D97-AF65-F5344CB8AC3E}">
-        <p14:creationId xmlns:p14="http://schemas.microsoft.com/office/powerpoint/2010/main" val="3372832802"/>
+        <p14:creationId xmlns:p14="http://schemas.microsoft.com/office/powerpoint/2010/main" val="2427644523"/>
       </p:ext>
     </p:extLst>
   </p:cSld>
@@ -7512,7 +7471,7 @@
             </a:r>
             <a:r>
               <a:rPr lang="en-US" altLang="zh-TW" dirty="0"/>
-              <a:t>network</a:t>
+              <a:t>reward</a:t>
             </a:r>
             <a:endParaRPr lang="zh-TW" altLang="en-US" dirty="0"/>
           </a:p>
@@ -7573,6 +7532,673 @@
             <a:fld id="{F61996F8-0416-4C00-B84C-381F9A6A2E93}" type="slidenum">
               <a:rPr lang="zh-TW" altLang="en-US" smtClean="0"/>
               <a:t>16</a:t>
+            </a:fld>
+            <a:endParaRPr lang="zh-TW" altLang="en-US"/>
+          </a:p>
+        </p:txBody>
+      </p:sp>
+      <p:sp>
+        <p:nvSpPr>
+          <p:cNvPr id="5" name="內容版面配置區 4">
+            <a:extLst>
+              <a:ext uri="{FF2B5EF4-FFF2-40B4-BE49-F238E27FC236}">
+                <a16:creationId xmlns:a16="http://schemas.microsoft.com/office/drawing/2014/main" id="{46CB4645-8B4E-4C68-869F-D9F48FECF0A1}"/>
+              </a:ext>
+            </a:extLst>
+          </p:cNvPr>
+          <p:cNvSpPr>
+            <a:spLocks noGrp="1"/>
+          </p:cNvSpPr>
+          <p:nvPr>
+            <p:ph idx="1"/>
+          </p:nvPr>
+        </p:nvSpPr>
+        <p:spPr>
+          <a:xfrm>
+            <a:off x="435428" y="1844039"/>
+            <a:ext cx="11756571" cy="4615745"/>
+          </a:xfrm>
+        </p:spPr>
+        <p:txBody>
+          <a:bodyPr>
+            <a:normAutofit/>
+          </a:bodyPr>
+          <a:lstStyle/>
+          <a:p>
+            <a:pPr>
+              <a:lnSpc>
+                <a:spcPct val="150000"/>
+              </a:lnSpc>
+            </a:pPr>
+            <a:r>
+              <a:rPr lang="zh-TW" altLang="en-US" sz="2000" dirty="0">
+                <a:solidFill>
+                  <a:srgbClr val="222222"/>
+                </a:solidFill>
+                <a:latin typeface="Arial" panose="020B0604020202020204" pitchFamily="34" charset="0"/>
+              </a:rPr>
+              <a:t>總</a:t>
+            </a:r>
+            <a:r>
+              <a:rPr lang="en-US" altLang="zh-TW" sz="2000" dirty="0">
+                <a:solidFill>
+                  <a:srgbClr val="222222"/>
+                </a:solidFill>
+                <a:latin typeface="Arial" panose="020B0604020202020204" pitchFamily="34" charset="0"/>
+              </a:rPr>
+              <a:t>reward = (</a:t>
+            </a:r>
+            <a:r>
+              <a:rPr lang="en-US" altLang="zh-TW" sz="2000" dirty="0" err="1">
+                <a:solidFill>
+                  <a:srgbClr val="222222"/>
+                </a:solidFill>
+                <a:latin typeface="Arial" panose="020B0604020202020204" pitchFamily="34" charset="0"/>
+              </a:rPr>
+              <a:t>reward_mk</a:t>
+            </a:r>
+            <a:r>
+              <a:rPr lang="en-US" altLang="zh-TW" sz="2000" dirty="0">
+                <a:solidFill>
+                  <a:srgbClr val="222222"/>
+                </a:solidFill>
+                <a:latin typeface="Arial" panose="020B0604020202020204" pitchFamily="34" charset="0"/>
+              </a:rPr>
+              <a:t> + </a:t>
+            </a:r>
+            <a:r>
+              <a:rPr lang="en-US" altLang="zh-TW" sz="2000" dirty="0" err="1">
+                <a:solidFill>
+                  <a:srgbClr val="222222"/>
+                </a:solidFill>
+                <a:latin typeface="Arial" panose="020B0604020202020204" pitchFamily="34" charset="0"/>
+              </a:rPr>
+              <a:t>reward_td</a:t>
+            </a:r>
+            <a:r>
+              <a:rPr lang="en-US" altLang="zh-TW" sz="2000" dirty="0">
+                <a:solidFill>
+                  <a:srgbClr val="222222"/>
+                </a:solidFill>
+                <a:latin typeface="Arial" panose="020B0604020202020204" pitchFamily="34" charset="0"/>
+              </a:rPr>
+              <a:t>) / </a:t>
+            </a:r>
+            <a:r>
+              <a:rPr lang="en-US" altLang="zh-TW" sz="2000" dirty="0" err="1">
+                <a:solidFill>
+                  <a:srgbClr val="222222"/>
+                </a:solidFill>
+                <a:latin typeface="Arial" panose="020B0604020202020204" pitchFamily="34" charset="0"/>
+              </a:rPr>
+              <a:t>n_j</a:t>
+            </a:r>
+            <a:r>
+              <a:rPr lang="zh-TW" altLang="en-US" sz="2000" dirty="0">
+                <a:solidFill>
+                  <a:srgbClr val="222222"/>
+                </a:solidFill>
+                <a:latin typeface="Arial" panose="020B0604020202020204" pitchFamily="34" charset="0"/>
+              </a:rPr>
+              <a:t>  、 除以</a:t>
+            </a:r>
+            <a:r>
+              <a:rPr lang="en-US" altLang="zh-TW" sz="2000" dirty="0" err="1">
+                <a:solidFill>
+                  <a:srgbClr val="222222"/>
+                </a:solidFill>
+                <a:latin typeface="Arial" panose="020B0604020202020204" pitchFamily="34" charset="0"/>
+              </a:rPr>
+              <a:t>n_j</a:t>
+            </a:r>
+            <a:r>
+              <a:rPr lang="zh-TW" altLang="en-US" sz="2000" dirty="0">
+                <a:solidFill>
+                  <a:srgbClr val="222222"/>
+                </a:solidFill>
+                <a:latin typeface="Arial" panose="020B0604020202020204" pitchFamily="34" charset="0"/>
+              </a:rPr>
+              <a:t>為了在課程式學習中適應不同大小</a:t>
+            </a:r>
+            <a:endParaRPr lang="en-US" altLang="zh-TW" sz="2000" dirty="0">
+              <a:solidFill>
+                <a:srgbClr val="222222"/>
+              </a:solidFill>
+              <a:latin typeface="Arial" panose="020B0604020202020204" pitchFamily="34" charset="0"/>
+            </a:endParaRPr>
+          </a:p>
+          <a:p>
+            <a:pPr>
+              <a:lnSpc>
+                <a:spcPct val="150000"/>
+              </a:lnSpc>
+            </a:pPr>
+            <a:r>
+              <a:rPr lang="en-US" altLang="zh-TW" sz="2000" dirty="0" err="1">
+                <a:solidFill>
+                  <a:srgbClr val="222222"/>
+                </a:solidFill>
+                <a:latin typeface="Arial" panose="020B0604020202020204" pitchFamily="34" charset="0"/>
+              </a:rPr>
+              <a:t>reward_mk</a:t>
+            </a:r>
+            <a:r>
+              <a:rPr lang="en-US" altLang="zh-TW" sz="2000" dirty="0">
+                <a:solidFill>
+                  <a:srgbClr val="222222"/>
+                </a:solidFill>
+                <a:latin typeface="Arial" panose="020B0604020202020204" pitchFamily="34" charset="0"/>
+              </a:rPr>
+              <a:t> = </a:t>
+            </a:r>
+            <a:r>
+              <a:rPr lang="zh-TW" altLang="en-US" sz="2000" dirty="0">
+                <a:solidFill>
+                  <a:srgbClr val="222222"/>
+                </a:solidFill>
+                <a:latin typeface="Arial" panose="020B0604020202020204" pitchFamily="34" charset="0"/>
+              </a:rPr>
+              <a:t>上步的</a:t>
+            </a:r>
+            <a:r>
+              <a:rPr lang="en-US" altLang="zh-TW" sz="2000" dirty="0">
+                <a:solidFill>
+                  <a:srgbClr val="222222"/>
+                </a:solidFill>
+                <a:latin typeface="Arial" panose="020B0604020202020204" pitchFamily="34" charset="0"/>
+              </a:rPr>
+              <a:t>MK</a:t>
+            </a:r>
+            <a:r>
+              <a:rPr lang="zh-TW" altLang="en-US" sz="2000" dirty="0">
+                <a:solidFill>
+                  <a:srgbClr val="222222"/>
+                </a:solidFill>
+                <a:latin typeface="Arial" panose="020B0604020202020204" pitchFamily="34" charset="0"/>
+              </a:rPr>
+              <a:t>下限 </a:t>
+            </a:r>
+            <a:r>
+              <a:rPr lang="en-US" altLang="zh-TW" sz="2000" dirty="0">
+                <a:solidFill>
+                  <a:srgbClr val="222222"/>
+                </a:solidFill>
+                <a:latin typeface="Arial" panose="020B0604020202020204" pitchFamily="34" charset="0"/>
+              </a:rPr>
+              <a:t>–</a:t>
+            </a:r>
+            <a:r>
+              <a:rPr lang="zh-TW" altLang="en-US" sz="2000" dirty="0">
+                <a:solidFill>
+                  <a:srgbClr val="222222"/>
+                </a:solidFill>
+                <a:latin typeface="Arial" panose="020B0604020202020204" pitchFamily="34" charset="0"/>
+              </a:rPr>
+              <a:t> 這步的</a:t>
+            </a:r>
+            <a:r>
+              <a:rPr lang="en-US" altLang="zh-TW" sz="2000" dirty="0">
+                <a:solidFill>
+                  <a:srgbClr val="222222"/>
+                </a:solidFill>
+                <a:latin typeface="Arial" panose="020B0604020202020204" pitchFamily="34" charset="0"/>
+              </a:rPr>
+              <a:t>MK</a:t>
+            </a:r>
+            <a:r>
+              <a:rPr lang="zh-TW" altLang="en-US" sz="2000" dirty="0">
+                <a:solidFill>
+                  <a:srgbClr val="222222"/>
+                </a:solidFill>
+                <a:latin typeface="Arial" panose="020B0604020202020204" pitchFamily="34" charset="0"/>
+              </a:rPr>
+              <a:t>下限  </a:t>
+            </a:r>
+            <a:r>
+              <a:rPr lang="en-US" altLang="zh-TW" sz="2000" dirty="0">
+                <a:solidFill>
+                  <a:srgbClr val="222222"/>
+                </a:solidFill>
+                <a:latin typeface="Arial" panose="020B0604020202020204" pitchFamily="34" charset="0"/>
+              </a:rPr>
+              <a:t>(</a:t>
+            </a:r>
+            <a:r>
+              <a:rPr lang="zh-TW" altLang="en-US" sz="2000" dirty="0">
+                <a:solidFill>
+                  <a:srgbClr val="222222"/>
+                </a:solidFill>
+                <a:latin typeface="Arial" panose="020B0604020202020204" pitchFamily="34" charset="0"/>
+              </a:rPr>
+              <a:t>論文中的時間單位為一個平均加工時間</a:t>
+            </a:r>
+            <a:r>
+              <a:rPr lang="en-US" altLang="zh-TW" sz="2000" dirty="0">
+                <a:solidFill>
+                  <a:srgbClr val="222222"/>
+                </a:solidFill>
+                <a:latin typeface="Arial" panose="020B0604020202020204" pitchFamily="34" charset="0"/>
+              </a:rPr>
+              <a:t>)</a:t>
+            </a:r>
+          </a:p>
+          <a:p>
+            <a:pPr>
+              <a:lnSpc>
+                <a:spcPct val="150000"/>
+              </a:lnSpc>
+            </a:pPr>
+            <a:r>
+              <a:rPr lang="zh-TW" altLang="en-US" sz="2000" dirty="0">
+                <a:solidFill>
+                  <a:srgbClr val="222222"/>
+                </a:solidFill>
+                <a:latin typeface="Arial" panose="020B0604020202020204" pitchFamily="34" charset="0"/>
+              </a:rPr>
+              <a:t> </a:t>
+            </a:r>
+            <a:r>
+              <a:rPr lang="en-US" altLang="zh-TW" sz="2000" dirty="0">
+                <a:solidFill>
+                  <a:srgbClr val="222222"/>
+                </a:solidFill>
+                <a:latin typeface="Arial" panose="020B0604020202020204" pitchFamily="34" charset="0"/>
+              </a:rPr>
+              <a:t>MK</a:t>
+            </a:r>
+            <a:r>
+              <a:rPr lang="zh-TW" altLang="en-US" sz="2000" dirty="0">
+                <a:solidFill>
+                  <a:srgbClr val="222222"/>
+                </a:solidFill>
+                <a:latin typeface="Arial" panose="020B0604020202020204" pitchFamily="34" charset="0"/>
+              </a:rPr>
+              <a:t>下限為 新全局下限 </a:t>
+            </a:r>
+            <a:r>
+              <a:rPr lang="en-US" altLang="zh-TW" sz="2000" dirty="0">
+                <a:solidFill>
+                  <a:srgbClr val="222222"/>
+                </a:solidFill>
+                <a:latin typeface="Arial" panose="020B0604020202020204" pitchFamily="34" charset="0"/>
+              </a:rPr>
+              <a:t>= max(</a:t>
+            </a:r>
+            <a:r>
+              <a:rPr lang="zh-TW" altLang="en-US" sz="2000" dirty="0">
+                <a:solidFill>
+                  <a:srgbClr val="222222"/>
+                </a:solidFill>
+                <a:latin typeface="Arial" panose="020B0604020202020204" pitchFamily="34" charset="0"/>
+              </a:rPr>
+              <a:t>其他 </a:t>
+            </a:r>
+            <a:r>
+              <a:rPr lang="en-US" altLang="zh-TW" sz="2000" dirty="0">
+                <a:solidFill>
+                  <a:srgbClr val="222222"/>
+                </a:solidFill>
+                <a:latin typeface="Arial" panose="020B0604020202020204" pitchFamily="34" charset="0"/>
+              </a:rPr>
+              <a:t>job </a:t>
+            </a:r>
+            <a:r>
+              <a:rPr lang="zh-TW" altLang="en-US" sz="2000" dirty="0">
+                <a:solidFill>
+                  <a:srgbClr val="222222"/>
+                </a:solidFill>
+                <a:latin typeface="Arial" panose="020B0604020202020204" pitchFamily="34" charset="0"/>
+              </a:rPr>
+              <a:t>原本的下界限 </a:t>
+            </a:r>
+            <a:r>
+              <a:rPr lang="en-US" altLang="zh-TW" sz="2000" dirty="0">
+                <a:solidFill>
+                  <a:srgbClr val="222222"/>
+                </a:solidFill>
+                <a:latin typeface="Arial" panose="020B0604020202020204" pitchFamily="34" charset="0"/>
+              </a:rPr>
+              <a:t>,</a:t>
+            </a:r>
+            <a:r>
+              <a:rPr lang="en-US" altLang="zh-TW" sz="2000" dirty="0" err="1">
+                <a:solidFill>
+                  <a:srgbClr val="222222"/>
+                </a:solidFill>
+                <a:latin typeface="Arial" panose="020B0604020202020204" pitchFamily="34" charset="0"/>
+              </a:rPr>
+              <a:t>job_j</a:t>
+            </a:r>
+            <a:r>
+              <a:rPr lang="en-US" altLang="zh-TW" sz="2000" dirty="0">
+                <a:solidFill>
+                  <a:srgbClr val="222222"/>
+                </a:solidFill>
+                <a:latin typeface="Arial" panose="020B0604020202020204" pitchFamily="34" charset="0"/>
+              </a:rPr>
+              <a:t> </a:t>
+            </a:r>
+            <a:r>
+              <a:rPr lang="zh-TW" altLang="en-US" sz="2000" dirty="0">
+                <a:solidFill>
+                  <a:srgbClr val="222222"/>
+                </a:solidFill>
+                <a:latin typeface="Arial" panose="020B0604020202020204" pitchFamily="34" charset="0"/>
+              </a:rPr>
+              <a:t>更新後的新下限</a:t>
+            </a:r>
+            <a:r>
+              <a:rPr lang="en-US" altLang="zh-TW" sz="2000" dirty="0">
+                <a:solidFill>
+                  <a:srgbClr val="222222"/>
+                </a:solidFill>
+                <a:latin typeface="Arial" panose="020B0604020202020204" pitchFamily="34" charset="0"/>
+              </a:rPr>
+              <a:t>)</a:t>
+            </a:r>
+            <a:r>
+              <a:rPr lang="zh-TW" altLang="en-US" sz="2000" dirty="0">
+                <a:solidFill>
+                  <a:srgbClr val="222222"/>
+                </a:solidFill>
+                <a:latin typeface="Arial" panose="020B0604020202020204" pitchFamily="34" charset="0"/>
+              </a:rPr>
+              <a:t>，而在排</a:t>
+            </a:r>
+            <a:r>
+              <a:rPr lang="en-US" altLang="zh-TW" sz="2000" dirty="0" err="1">
+                <a:solidFill>
+                  <a:srgbClr val="222222"/>
+                </a:solidFill>
+                <a:latin typeface="Arial" panose="020B0604020202020204" pitchFamily="34" charset="0"/>
+              </a:rPr>
+              <a:t>job_j</a:t>
+            </a:r>
+            <a:r>
+              <a:rPr lang="zh-TW" altLang="en-US" sz="2000" dirty="0">
+                <a:solidFill>
+                  <a:srgbClr val="222222"/>
+                </a:solidFill>
+                <a:latin typeface="Arial" panose="020B0604020202020204" pitchFamily="34" charset="0"/>
+              </a:rPr>
+              <a:t>時只會更新</a:t>
+            </a:r>
+            <a:r>
+              <a:rPr lang="en-US" altLang="zh-TW" sz="2000" dirty="0" err="1">
+                <a:solidFill>
+                  <a:srgbClr val="222222"/>
+                </a:solidFill>
+                <a:latin typeface="Arial" panose="020B0604020202020204" pitchFamily="34" charset="0"/>
+              </a:rPr>
+              <a:t>job_j</a:t>
+            </a:r>
+            <a:r>
+              <a:rPr lang="zh-TW" altLang="en-US" sz="2000" dirty="0">
+                <a:solidFill>
+                  <a:srgbClr val="222222"/>
+                </a:solidFill>
+                <a:latin typeface="Arial" panose="020B0604020202020204" pitchFamily="34" charset="0"/>
+              </a:rPr>
+              <a:t>下限，所以當</a:t>
+            </a:r>
+            <a:r>
+              <a:rPr lang="en-US" altLang="zh-TW" sz="2000" dirty="0" err="1">
+                <a:solidFill>
+                  <a:srgbClr val="222222"/>
+                </a:solidFill>
+                <a:latin typeface="Arial" panose="020B0604020202020204" pitchFamily="34" charset="0"/>
+              </a:rPr>
+              <a:t>job_j</a:t>
+            </a:r>
+            <a:r>
+              <a:rPr lang="zh-TW" altLang="en-US" sz="2000" dirty="0">
+                <a:solidFill>
+                  <a:srgbClr val="222222"/>
+                </a:solidFill>
+                <a:latin typeface="Arial" panose="020B0604020202020204" pitchFamily="34" charset="0"/>
+              </a:rPr>
+              <a:t>下限更新後沒有比其他 </a:t>
+            </a:r>
+            <a:r>
+              <a:rPr lang="en-US" altLang="zh-TW" sz="2000" dirty="0">
+                <a:solidFill>
+                  <a:srgbClr val="222222"/>
+                </a:solidFill>
+                <a:latin typeface="Arial" panose="020B0604020202020204" pitchFamily="34" charset="0"/>
+              </a:rPr>
+              <a:t>job </a:t>
+            </a:r>
+            <a:r>
+              <a:rPr lang="zh-TW" altLang="en-US" sz="2000" dirty="0">
+                <a:solidFill>
+                  <a:srgbClr val="222222"/>
+                </a:solidFill>
+                <a:latin typeface="Arial" panose="020B0604020202020204" pitchFamily="34" charset="0"/>
+              </a:rPr>
+              <a:t>原本的下界限</a:t>
+            </a:r>
+            <a:r>
+              <a:rPr lang="zh-TW" altLang="en-US" sz="2000">
+                <a:solidFill>
+                  <a:srgbClr val="222222"/>
+                </a:solidFill>
+                <a:latin typeface="Arial" panose="020B0604020202020204" pitchFamily="34" charset="0"/>
+              </a:rPr>
+              <a:t>大，新全局下限會一樣。</a:t>
+            </a:r>
+            <a:endParaRPr lang="en-US" altLang="zh-TW" sz="2000" dirty="0">
+              <a:solidFill>
+                <a:srgbClr val="222222"/>
+              </a:solidFill>
+              <a:latin typeface="Arial" panose="020B0604020202020204" pitchFamily="34" charset="0"/>
+            </a:endParaRPr>
+          </a:p>
+          <a:p>
+            <a:pPr>
+              <a:lnSpc>
+                <a:spcPct val="150000"/>
+              </a:lnSpc>
+            </a:pPr>
+            <a:r>
+              <a:rPr lang="en-US" altLang="zh-TW" sz="2000" dirty="0" err="1">
+                <a:solidFill>
+                  <a:srgbClr val="222222"/>
+                </a:solidFill>
+                <a:latin typeface="Arial" panose="020B0604020202020204" pitchFamily="34" charset="0"/>
+              </a:rPr>
+              <a:t>reward_td</a:t>
+            </a:r>
+            <a:r>
+              <a:rPr lang="en-US" altLang="zh-TW" sz="2000" dirty="0">
+                <a:solidFill>
+                  <a:srgbClr val="222222"/>
+                </a:solidFill>
+                <a:latin typeface="Arial" panose="020B0604020202020204" pitchFamily="34" charset="0"/>
+              </a:rPr>
+              <a:t> = - alpha * (tardiness / </a:t>
+            </a:r>
+            <a:r>
+              <a:rPr lang="en-US" altLang="zh-TW" sz="2000" dirty="0" err="1">
+                <a:solidFill>
+                  <a:srgbClr val="222222"/>
+                </a:solidFill>
+                <a:latin typeface="Arial" panose="020B0604020202020204" pitchFamily="34" charset="0"/>
+              </a:rPr>
+              <a:t>mean_op_pt</a:t>
+            </a:r>
+            <a:r>
+              <a:rPr lang="en-US" altLang="zh-TW" sz="2000" dirty="0">
+                <a:solidFill>
+                  <a:srgbClr val="222222"/>
+                </a:solidFill>
+                <a:latin typeface="Arial" panose="020B0604020202020204" pitchFamily="34" charset="0"/>
+              </a:rPr>
+              <a:t> )</a:t>
+            </a:r>
+          </a:p>
+          <a:p>
+            <a:pPr>
+              <a:lnSpc>
+                <a:spcPct val="150000"/>
+              </a:lnSpc>
+            </a:pPr>
+            <a:r>
+              <a:rPr lang="zh-TW" altLang="en-US" sz="2000" dirty="0">
+                <a:solidFill>
+                  <a:srgbClr val="222222"/>
+                </a:solidFill>
+                <a:latin typeface="Arial" panose="020B0604020202020204" pitchFamily="34" charset="0"/>
+              </a:rPr>
+              <a:t>除以 </a:t>
+            </a:r>
+            <a:r>
+              <a:rPr lang="en-US" altLang="zh-TW" sz="2000" dirty="0" err="1">
+                <a:solidFill>
+                  <a:srgbClr val="222222"/>
+                </a:solidFill>
+                <a:latin typeface="Arial" panose="020B0604020202020204" pitchFamily="34" charset="0"/>
+              </a:rPr>
+              <a:t>mean_op_pt</a:t>
+            </a:r>
+            <a:r>
+              <a:rPr lang="zh-TW" altLang="en-US" sz="2000" dirty="0">
+                <a:solidFill>
+                  <a:srgbClr val="222222"/>
+                </a:solidFill>
+                <a:latin typeface="Arial" panose="020B0604020202020204" pitchFamily="34" charset="0"/>
+              </a:rPr>
+              <a:t>對齊</a:t>
+            </a:r>
+            <a:r>
+              <a:rPr lang="en-US" altLang="zh-TW" sz="2000" dirty="0">
+                <a:solidFill>
+                  <a:srgbClr val="222222"/>
+                </a:solidFill>
+                <a:latin typeface="Arial" panose="020B0604020202020204" pitchFamily="34" charset="0"/>
+              </a:rPr>
+              <a:t>MK</a:t>
+            </a:r>
+          </a:p>
+        </p:txBody>
+      </p:sp>
+    </p:spTree>
+    <p:extLst>
+      <p:ext uri="{BB962C8B-B14F-4D97-AF65-F5344CB8AC3E}">
+        <p14:creationId xmlns:p14="http://schemas.microsoft.com/office/powerpoint/2010/main" val="3372832802"/>
+      </p:ext>
+    </p:extLst>
+  </p:cSld>
+  <p:clrMapOvr>
+    <a:masterClrMapping/>
+  </p:clrMapOvr>
+</p:sld>
+</file>
+
+<file path=ppt/slides/slide17.xml><?xml version="1.0" encoding="utf-8"?>
+<p:sld xmlns:a="http://schemas.openxmlformats.org/drawingml/2006/main" xmlns:r="http://schemas.openxmlformats.org/officeDocument/2006/relationships" xmlns:p="http://schemas.openxmlformats.org/presentationml/2006/main">
+  <p:cSld>
+    <p:spTree>
+      <p:nvGrpSpPr>
+        <p:cNvPr id="1" name=""/>
+        <p:cNvGrpSpPr/>
+        <p:nvPr/>
+      </p:nvGrpSpPr>
+      <p:grpSpPr>
+        <a:xfrm>
+          <a:off x="0" y="0"/>
+          <a:ext cx="0" cy="0"/>
+          <a:chOff x="0" y="0"/>
+          <a:chExt cx="0" cy="0"/>
+        </a:xfrm>
+      </p:grpSpPr>
+      <p:sp>
+        <p:nvSpPr>
+          <p:cNvPr id="2" name="標題 1">
+            <a:extLst>
+              <a:ext uri="{FF2B5EF4-FFF2-40B4-BE49-F238E27FC236}">
+                <a16:creationId xmlns:a16="http://schemas.microsoft.com/office/drawing/2014/main" id="{2A9FD4FE-5C03-423D-8D96-AE6523A51D4B}"/>
+              </a:ext>
+            </a:extLst>
+          </p:cNvPr>
+          <p:cNvSpPr>
+            <a:spLocks noGrp="1"/>
+          </p:cNvSpPr>
+          <p:nvPr>
+            <p:ph type="title"/>
+          </p:nvPr>
+        </p:nvSpPr>
+        <p:spPr/>
+        <p:txBody>
+          <a:bodyPr/>
+          <a:lstStyle/>
+          <a:p>
+            <a:r>
+              <a:rPr lang="zh-TW" altLang="en-US" dirty="0"/>
+              <a:t>下層</a:t>
+            </a:r>
+            <a:r>
+              <a:rPr lang="en-US" altLang="zh-TW" dirty="0"/>
+              <a:t>network</a:t>
+            </a:r>
+            <a:endParaRPr lang="zh-TW" altLang="en-US" dirty="0"/>
+          </a:p>
+        </p:txBody>
+      </p:sp>
+      <p:sp>
+        <p:nvSpPr>
+          <p:cNvPr id="3" name="頁尾版面配置區 2">
+            <a:extLst>
+              <a:ext uri="{FF2B5EF4-FFF2-40B4-BE49-F238E27FC236}">
+                <a16:creationId xmlns:a16="http://schemas.microsoft.com/office/drawing/2014/main" id="{C303F1DA-90BC-4AE7-B88E-1FB50D3D1CE1}"/>
+              </a:ext>
+            </a:extLst>
+          </p:cNvPr>
+          <p:cNvSpPr>
+            <a:spLocks noGrp="1"/>
+          </p:cNvSpPr>
+          <p:nvPr>
+            <p:ph type="ftr" sz="quarter" idx="11"/>
+          </p:nvPr>
+        </p:nvSpPr>
+        <p:spPr/>
+        <p:txBody>
+          <a:bodyPr/>
+          <a:lstStyle/>
+          <a:p>
+            <a:r>
+              <a:rPr lang="en-US" altLang="zh-TW">
+                <a:ea typeface="Cascadia Code" panose="020B0609020000020004" pitchFamily="49" charset="0"/>
+              </a:rPr>
+              <a:t>Smart Production and System Simulation Lab</a:t>
+            </a:r>
+            <a:endParaRPr lang="zh-TW" altLang="en-US" dirty="0"/>
+          </a:p>
+        </p:txBody>
+      </p:sp>
+      <p:sp>
+        <p:nvSpPr>
+          <p:cNvPr id="4" name="投影片編號版面配置區 3">
+            <a:extLst>
+              <a:ext uri="{FF2B5EF4-FFF2-40B4-BE49-F238E27FC236}">
+                <a16:creationId xmlns:a16="http://schemas.microsoft.com/office/drawing/2014/main" id="{75F63131-ABC7-46C1-AFA1-82001E69063D}"/>
+              </a:ext>
+            </a:extLst>
+          </p:cNvPr>
+          <p:cNvSpPr>
+            <a:spLocks noGrp="1"/>
+          </p:cNvSpPr>
+          <p:nvPr>
+            <p:ph type="sldNum" sz="quarter" idx="12"/>
+          </p:nvPr>
+        </p:nvSpPr>
+        <p:spPr/>
+        <p:txBody>
+          <a:bodyPr/>
+          <a:lstStyle/>
+          <a:p>
+            <a:fld id="{F61996F8-0416-4C00-B84C-381F9A6A2E93}" type="slidenum">
+              <a:rPr lang="zh-TW" altLang="en-US" smtClean="0"/>
+              <a:t>17</a:t>
             </a:fld>
             <a:endParaRPr lang="zh-TW" altLang="en-US"/>
           </a:p>
@@ -7627,7 +8253,7 @@
 </p:sld>
 </file>
 
-<file path=ppt/slides/slide17.xml><?xml version="1.0" encoding="utf-8"?>
+<file path=ppt/slides/slide18.xml><?xml version="1.0" encoding="utf-8"?>
 <p:sld xmlns:a="http://schemas.openxmlformats.org/drawingml/2006/main" xmlns:r="http://schemas.openxmlformats.org/officeDocument/2006/relationships" xmlns:p="http://schemas.openxmlformats.org/presentationml/2006/main">
   <p:cSld>
     <p:spTree>
@@ -7707,7 +8333,7 @@
             <a:fld id="{F61996F8-0416-4C00-B84C-381F9A6A2E93}" type="slidenum">
               <a:rPr lang="zh-TW" altLang="en-US" smtClean="0"/>
               <a:pPr/>
-              <a:t>17</a:t>
+              <a:t>18</a:t>
             </a:fld>
             <a:endParaRPr lang="zh-TW" altLang="en-US" dirty="0"/>
           </a:p>
